--- a/project_15_heart_disease_prediction/presentations/project_presentation.pptx
+++ b/project_15_heart_disease_prediction/presentations/project_presentation.pptx
@@ -13,6 +13,13 @@
     <p:sldId id="261" r:id="rId12"/>
     <p:sldId id="262" r:id="rId13"/>
     <p:sldId id="263" r:id="rId14"/>
+    <p:sldId id="264" r:id="rId15"/>
+    <p:sldId id="265" r:id="rId16"/>
+    <p:sldId id="266" r:id="rId17"/>
+    <p:sldId id="267" r:id="rId18"/>
+    <p:sldId id="268" r:id="rId19"/>
+    <p:sldId id="269" r:id="rId20"/>
+    <p:sldId id="270" r:id="rId21"/>
   </p:sldIdLst>
   <p:sldSz cx="12191695" cy="6858000" type="screen4x3"/>
   <p:notesSz cx="6858000" cy="9144000"/>
@@ -3146,8 +3153,8 @@
         </p:nvSpPr>
         <p:spPr>
           <a:xfrm>
-            <a:off x="1097280" y="1645920"/>
-            <a:ext cx="10058400" cy="3474720"/>
+            <a:off x="914400" y="1645920"/>
+            <a:ext cx="10362895" cy="3474720"/>
           </a:xfrm>
           <a:prstGeom prst="rect">
             <a:avLst/>
@@ -3161,44 +3168,2243 @@
           <a:lstStyle/>
           <a:p>
             <a:pPr>
-              <a:defRPr sz="1400" b="1">
-                <a:solidFill>
-                  <a:srgbClr val="38BDF8"/>
-                </a:solidFill>
-              </a:defRPr>
-            </a:pPr>
-            <a:r>
-              <a:t>PROJECT 15 OF 55  •  RESEARCH &amp; IMPLEMENTATION DECK</a:t>
-            </a:r>
-          </a:p>
-          <a:p>
-            <a:pPr>
-              <a:spcBef>
-                <a:spcPts val="1400"/>
-              </a:spcBef>
-              <a:defRPr sz="3200" b="1">
-                <a:solidFill>
-                  <a:srgbClr val="FFFFFF"/>
-                </a:solidFill>
-              </a:defRPr>
-            </a:pPr>
-            <a:r>
-              <a:t>Heart Disease Prediction</a:t>
-            </a:r>
-          </a:p>
-          <a:p>
-            <a:pPr>
-              <a:spcBef>
-                <a:spcPts val="1200"/>
-              </a:spcBef>
+              <a:defRPr sz="1300" b="1">
+                <a:solidFill>
+                  <a:srgbClr val="2563EB"/>
+                </a:solidFill>
+              </a:defRPr>
+            </a:pPr>
+            <a:r>
+              <a:t>PROJECT 15 OF 55 • BIOMEDICAL INFORMATICS &amp; MACHINE LEARNING</a:t>
+            </a:r>
+          </a:p>
+          <a:p>
+            <a:pPr>
+              <a:defRPr sz="3000" b="1">
+                <a:solidFill>
+                  <a:srgbClr val="F8FAFC"/>
+                </a:solidFill>
+              </a:defRPr>
+            </a:pPr>
+            <a:r>
+              <a:t>CardioPredict: Advanced Heart Disease Prediction &amp; Multi-Factor Diagnostic Platform</a:t>
+            </a:r>
+          </a:p>
+          <a:p>
+            <a:pPr>
               <a:defRPr sz="1600">
                 <a:solidFill>
-                  <a:srgbClr val="CBD5E1"/>
-                </a:solidFill>
-              </a:defRPr>
-            </a:pPr>
-            <a:r>
-              <a:t>Enterprise-Grade AI Architecture, Machine Learning Pipeline &amp; Deployment Framework</a:t>
+                  <a:srgbClr val="10B981"/>
+                </a:solidFill>
+              </a:defRPr>
+            </a:pPr>
+            <a:r>
+              <a:t>Random Forest Ensemble Classification, ReportLab Clinical PDF Reporting &amp; Real-Time Patient Analytics</a:t>
+            </a:r>
+          </a:p>
+          <a:p>
+            <a:br/>
+            <a:pPr>
+              <a:defRPr sz="1300">
+                <a:solidFill>
+                  <a:srgbClr val="94A3B8"/>
+                </a:solidFill>
+              </a:defRPr>
+            </a:pPr>
+            <a:r>
+              <a:t>Academic Capstone Submission • Final Year Engineering Defense • Port 5015</a:t>
+            </a:r>
+            <a:br/>
+            <a:r>
+              <a:t>Full-Stack React + Flask Microservice • 11 Physiological Features • SQLite Patient Registry</a:t>
+            </a:r>
+          </a:p>
+        </p:txBody>
+      </p:sp>
+    </p:spTree>
+  </p:cSld>
+  <p:clrMapOvr>
+    <a:masterClrMapping/>
+  </p:clrMapOvr>
+</p:sld>
+</file>
+
+<file path=ppt/slides/slide10.xml><?xml version="1.0" encoding="utf-8"?>
+<p:sld xmlns:a="http://schemas.openxmlformats.org/drawingml/2006/main" xmlns:p="http://schemas.openxmlformats.org/presentationml/2006/main" xmlns:r="http://schemas.openxmlformats.org/officeDocument/2006/relationships">
+  <p:cSld>
+    <p:spTree>
+      <p:nvGrpSpPr>
+        <p:cNvPr id="1" name=""/>
+        <p:cNvGrpSpPr/>
+        <p:nvPr/>
+      </p:nvGrpSpPr>
+      <p:grpSpPr/>
+      <p:sp>
+        <p:nvSpPr>
+          <p:cNvPr id="2" name="Rectangle 1"/>
+          <p:cNvSpPr/>
+          <p:nvPr/>
+        </p:nvSpPr>
+        <p:spPr>
+          <a:xfrm>
+            <a:off x="0" y="0"/>
+            <a:ext cx="12191695" cy="6858000"/>
+          </a:xfrm>
+          <a:prstGeom prst="rect">
+            <a:avLst/>
+          </a:prstGeom>
+          <a:solidFill>
+            <a:srgbClr val="0F172A"/>
+          </a:solidFill>
+          <a:ln>
+            <a:noFill/>
+          </a:ln>
+        </p:spPr>
+        <p:style>
+          <a:lnRef idx="1">
+            <a:schemeClr val="accent1"/>
+          </a:lnRef>
+          <a:fillRef idx="3">
+            <a:schemeClr val="accent1"/>
+          </a:fillRef>
+          <a:effectRef idx="2">
+            <a:schemeClr val="accent1"/>
+          </a:effectRef>
+          <a:fontRef idx="minor">
+            <a:schemeClr val="lt1"/>
+          </a:fontRef>
+        </p:style>
+        <p:txBody>
+          <a:bodyPr rtlCol="0" anchor="ctr"/>
+          <a:lstStyle/>
+          <a:p>
+            <a:pPr algn="ctr"/>
+          </a:p>
+        </p:txBody>
+      </p:sp>
+      <p:sp>
+        <p:nvSpPr>
+          <p:cNvPr id="3" name="TextBox 2"/>
+          <p:cNvSpPr txBox="1"/>
+          <p:nvPr/>
+        </p:nvSpPr>
+        <p:spPr>
+          <a:xfrm>
+            <a:off x="731520" y="365760"/>
+            <a:ext cx="10728655" cy="1005840"/>
+          </a:xfrm>
+          <a:prstGeom prst="rect">
+            <a:avLst/>
+          </a:prstGeom>
+          <a:noFill/>
+        </p:spPr>
+        <p:txBody>
+          <a:bodyPr wrap="square">
+            <a:spAutoFit/>
+          </a:bodyPr>
+          <a:lstStyle/>
+          <a:p>
+            <a:pPr>
+              <a:defRPr sz="1100" b="1">
+                <a:solidFill>
+                  <a:srgbClr val="2563EB"/>
+                </a:solidFill>
+              </a:defRPr>
+            </a:pPr>
+            <a:r>
+              <a:t>SYSTEM VERIFICATION &amp; LIVE TELEMETRY • SLIDE 10</a:t>
+            </a:r>
+          </a:p>
+          <a:p>
+            <a:pPr>
+              <a:defRPr sz="2200" b="1">
+                <a:solidFill>
+                  <a:srgbClr val="F8FAFC"/>
+                </a:solidFill>
+              </a:defRPr>
+            </a:pPr>
+            <a:r>
+              <a:t>Live UI: High-Risk Heart Disease Alert &amp; Result Banner</a:t>
+            </a:r>
+          </a:p>
+        </p:txBody>
+      </p:sp>
+      <p:pic>
+        <p:nvPicPr>
+          <p:cNvPr id="4" name="Picture 3" descr="03_high_risk_prediction_alert.png"/>
+          <p:cNvPicPr>
+            <a:picLocks noChangeAspect="1"/>
+          </p:cNvPicPr>
+          <p:nvPr/>
+        </p:nvPicPr>
+        <p:blipFill>
+          <a:blip r:embed="rId2"/>
+          <a:stretch>
+            <a:fillRect/>
+          </a:stretch>
+        </p:blipFill>
+        <p:spPr>
+          <a:xfrm>
+            <a:off x="731520" y="1645920"/>
+            <a:ext cx="6949440" cy="4389120"/>
+          </a:xfrm>
+          <a:prstGeom prst="rect">
+            <a:avLst/>
+          </a:prstGeom>
+        </p:spPr>
+      </p:pic>
+      <p:sp>
+        <p:nvSpPr>
+          <p:cNvPr id="5" name="Rounded Rectangle 4"/>
+          <p:cNvSpPr/>
+          <p:nvPr/>
+        </p:nvSpPr>
+        <p:spPr>
+          <a:xfrm>
+            <a:off x="7955279" y="1645920"/>
+            <a:ext cx="3474720" cy="4389120"/>
+          </a:xfrm>
+          <a:prstGeom prst="roundRect">
+            <a:avLst/>
+          </a:prstGeom>
+          <a:solidFill>
+            <a:srgbClr val="1E293B"/>
+          </a:solidFill>
+          <a:ln w="19050">
+            <a:solidFill>
+              <a:srgbClr val="2563EB"/>
+            </a:solidFill>
+          </a:ln>
+        </p:spPr>
+        <p:style>
+          <a:lnRef idx="1">
+            <a:schemeClr val="accent1"/>
+          </a:lnRef>
+          <a:fillRef idx="3">
+            <a:schemeClr val="accent1"/>
+          </a:fillRef>
+          <a:effectRef idx="2">
+            <a:schemeClr val="accent1"/>
+          </a:effectRef>
+          <a:fontRef idx="minor">
+            <a:schemeClr val="lt1"/>
+          </a:fontRef>
+        </p:style>
+        <p:txBody>
+          <a:bodyPr rtlCol="0" anchor="ctr" wrap="square"/>
+          <a:lstStyle/>
+          <a:p>
+            <a:pPr algn="ctr">
+              <a:defRPr sz="1500" b="1">
+                <a:solidFill>
+                  <a:srgbClr val="2563EB"/>
+                </a:solidFill>
+              </a:defRPr>
+            </a:pPr>
+            <a:r>
+              <a:t>Immediate Clinical Triage</a:t>
+            </a:r>
+          </a:p>
+          <a:p>
+            <a:pPr>
+              <a:defRPr sz="1100">
+                <a:solidFill>
+                  <a:srgbClr val="94A3B8"/>
+                </a:solidFill>
+              </a:defRPr>
+            </a:pPr>
+            <a:r>
+              <a:t>• Urgent crimson alert banner: 'Heart Disease Detected' triggered for high-risk patient.</a:t>
+            </a:r>
+          </a:p>
+          <a:p>
+            <a:pPr>
+              <a:defRPr sz="1100">
+                <a:solidFill>
+                  <a:srgbClr val="94A3B8"/>
+                </a:solidFill>
+              </a:defRPr>
+            </a:pPr>
+            <a:r>
+              <a:t>• Single-click 'Download PDF Report' button generating physician-signed assessment report.</a:t>
+            </a:r>
+          </a:p>
+          <a:p>
+            <a:pPr>
+              <a:defRPr sz="1100">
+                <a:solidFill>
+                  <a:srgbClr val="94A3B8"/>
+                </a:solidFill>
+              </a:defRPr>
+            </a:pPr>
+            <a:r>
+              <a:t>• Quick 'View Dashboard' action smooth-scrolling directly to graphical analysis charts.</a:t>
+            </a:r>
+          </a:p>
+          <a:p>
+            <a:pPr>
+              <a:defRPr sz="1100">
+                <a:solidFill>
+                  <a:srgbClr val="94A3B8"/>
+                </a:solidFill>
+              </a:defRPr>
+            </a:pPr>
+            <a:r>
+              <a:t>• Instant asynchronous inference returning complete probability scores in &lt; 5ms.</a:t>
+            </a:r>
+          </a:p>
+        </p:txBody>
+      </p:sp>
+    </p:spTree>
+  </p:cSld>
+  <p:clrMapOvr>
+    <a:masterClrMapping/>
+  </p:clrMapOvr>
+</p:sld>
+</file>
+
+<file path=ppt/slides/slide11.xml><?xml version="1.0" encoding="utf-8"?>
+<p:sld xmlns:a="http://schemas.openxmlformats.org/drawingml/2006/main" xmlns:p="http://schemas.openxmlformats.org/presentationml/2006/main" xmlns:r="http://schemas.openxmlformats.org/officeDocument/2006/relationships">
+  <p:cSld>
+    <p:spTree>
+      <p:nvGrpSpPr>
+        <p:cNvPr id="1" name=""/>
+        <p:cNvGrpSpPr/>
+        <p:nvPr/>
+      </p:nvGrpSpPr>
+      <p:grpSpPr/>
+      <p:sp>
+        <p:nvSpPr>
+          <p:cNvPr id="2" name="Rectangle 1"/>
+          <p:cNvSpPr/>
+          <p:nvPr/>
+        </p:nvSpPr>
+        <p:spPr>
+          <a:xfrm>
+            <a:off x="0" y="0"/>
+            <a:ext cx="12191695" cy="6858000"/>
+          </a:xfrm>
+          <a:prstGeom prst="rect">
+            <a:avLst/>
+          </a:prstGeom>
+          <a:solidFill>
+            <a:srgbClr val="0F172A"/>
+          </a:solidFill>
+          <a:ln>
+            <a:noFill/>
+          </a:ln>
+        </p:spPr>
+        <p:style>
+          <a:lnRef idx="1">
+            <a:schemeClr val="accent1"/>
+          </a:lnRef>
+          <a:fillRef idx="3">
+            <a:schemeClr val="accent1"/>
+          </a:fillRef>
+          <a:effectRef idx="2">
+            <a:schemeClr val="accent1"/>
+          </a:effectRef>
+          <a:fontRef idx="minor">
+            <a:schemeClr val="lt1"/>
+          </a:fontRef>
+        </p:style>
+        <p:txBody>
+          <a:bodyPr rtlCol="0" anchor="ctr"/>
+          <a:lstStyle/>
+          <a:p>
+            <a:pPr algn="ctr"/>
+          </a:p>
+        </p:txBody>
+      </p:sp>
+      <p:sp>
+        <p:nvSpPr>
+          <p:cNvPr id="3" name="TextBox 2"/>
+          <p:cNvSpPr txBox="1"/>
+          <p:nvPr/>
+        </p:nvSpPr>
+        <p:spPr>
+          <a:xfrm>
+            <a:off x="731520" y="365760"/>
+            <a:ext cx="10728655" cy="1005840"/>
+          </a:xfrm>
+          <a:prstGeom prst="rect">
+            <a:avLst/>
+          </a:prstGeom>
+          <a:noFill/>
+        </p:spPr>
+        <p:txBody>
+          <a:bodyPr wrap="square">
+            <a:spAutoFit/>
+          </a:bodyPr>
+          <a:lstStyle/>
+          <a:p>
+            <a:pPr>
+              <a:defRPr sz="1100" b="1">
+                <a:solidFill>
+                  <a:srgbClr val="2563EB"/>
+                </a:solidFill>
+              </a:defRPr>
+            </a:pPr>
+            <a:r>
+              <a:t>SYSTEM VERIFICATION &amp; LIVE TELEMETRY • SLIDE 11</a:t>
+            </a:r>
+          </a:p>
+          <a:p>
+            <a:pPr>
+              <a:defRPr sz="2200" b="1">
+                <a:solidFill>
+                  <a:srgbClr val="F8FAFC"/>
+                </a:solidFill>
+              </a:defRPr>
+            </a:pPr>
+            <a:r>
+              <a:t>Live UI: Vital Signs Comparison vs Healthy Baselines</a:t>
+            </a:r>
+          </a:p>
+        </p:txBody>
+      </p:sp>
+      <p:pic>
+        <p:nvPicPr>
+          <p:cNvPr id="4" name="Picture 3" descr="04_vitals_comparison_chart.png"/>
+          <p:cNvPicPr>
+            <a:picLocks noChangeAspect="1"/>
+          </p:cNvPicPr>
+          <p:nvPr/>
+        </p:nvPicPr>
+        <p:blipFill>
+          <a:blip r:embed="rId2"/>
+          <a:stretch>
+            <a:fillRect/>
+          </a:stretch>
+        </p:blipFill>
+        <p:spPr>
+          <a:xfrm>
+            <a:off x="731520" y="1645920"/>
+            <a:ext cx="6949440" cy="4389120"/>
+          </a:xfrm>
+          <a:prstGeom prst="rect">
+            <a:avLst/>
+          </a:prstGeom>
+        </p:spPr>
+      </p:pic>
+      <p:sp>
+        <p:nvSpPr>
+          <p:cNvPr id="5" name="Rounded Rectangle 4"/>
+          <p:cNvSpPr/>
+          <p:nvPr/>
+        </p:nvSpPr>
+        <p:spPr>
+          <a:xfrm>
+            <a:off x="7955279" y="1645920"/>
+            <a:ext cx="3474720" cy="4389120"/>
+          </a:xfrm>
+          <a:prstGeom prst="roundRect">
+            <a:avLst/>
+          </a:prstGeom>
+          <a:solidFill>
+            <a:srgbClr val="1E293B"/>
+          </a:solidFill>
+          <a:ln w="19050">
+            <a:solidFill>
+              <a:srgbClr val="2563EB"/>
+            </a:solidFill>
+          </a:ln>
+        </p:spPr>
+        <p:style>
+          <a:lnRef idx="1">
+            <a:schemeClr val="accent1"/>
+          </a:lnRef>
+          <a:fillRef idx="3">
+            <a:schemeClr val="accent1"/>
+          </a:fillRef>
+          <a:effectRef idx="2">
+            <a:schemeClr val="accent1"/>
+          </a:effectRef>
+          <a:fontRef idx="minor">
+            <a:schemeClr val="lt1"/>
+          </a:fontRef>
+        </p:style>
+        <p:txBody>
+          <a:bodyPr rtlCol="0" anchor="ctr" wrap="square"/>
+          <a:lstStyle/>
+          <a:p>
+            <a:pPr algn="ctr">
+              <a:defRPr sz="1500" b="1">
+                <a:solidFill>
+                  <a:srgbClr val="2563EB"/>
+                </a:solidFill>
+              </a:defRPr>
+            </a:pPr>
+            <a:r>
+              <a:t>Bar Chart Vitals Analytics</a:t>
+            </a:r>
+          </a:p>
+          <a:p>
+            <a:pPr>
+              <a:defRPr sz="1100">
+                <a:solidFill>
+                  <a:srgbClr val="94A3B8"/>
+                </a:solidFill>
+              </a:defRPr>
+            </a:pPr>
+            <a:r>
+              <a:t>• Interactive Chart.js bar chart comparing patient blood pressure, heart rate, and cholesterol.</a:t>
+            </a:r>
+          </a:p>
+          <a:p>
+            <a:pPr>
+              <a:defRPr sz="1100">
+                <a:solidFill>
+                  <a:srgbClr val="94A3B8"/>
+                </a:solidFill>
+              </a:defRPr>
+            </a:pPr>
+            <a:r>
+              <a:t>• Contrasts patient values directly against standard healthy population reference averages.</a:t>
+            </a:r>
+          </a:p>
+          <a:p>
+            <a:pPr>
+              <a:defRPr sz="1100">
+                <a:solidFill>
+                  <a:srgbClr val="94A3B8"/>
+                </a:solidFill>
+              </a:defRPr>
+            </a:pPr>
+            <a:r>
+              <a:t>• Clear color-coded bars: Blue (patient values) vs Green (normal healthy baselines).</a:t>
+            </a:r>
+          </a:p>
+          <a:p>
+            <a:pPr>
+              <a:defRPr sz="1100">
+                <a:solidFill>
+                  <a:srgbClr val="94A3B8"/>
+                </a:solidFill>
+              </a:defRPr>
+            </a:pPr>
+            <a:r>
+              <a:t>• Instant visual identification of hypertension or hypercholesterolemia spikes.</a:t>
+            </a:r>
+          </a:p>
+        </p:txBody>
+      </p:sp>
+    </p:spTree>
+  </p:cSld>
+  <p:clrMapOvr>
+    <a:masterClrMapping/>
+  </p:clrMapOvr>
+</p:sld>
+</file>
+
+<file path=ppt/slides/slide12.xml><?xml version="1.0" encoding="utf-8"?>
+<p:sld xmlns:a="http://schemas.openxmlformats.org/drawingml/2006/main" xmlns:p="http://schemas.openxmlformats.org/presentationml/2006/main" xmlns:r="http://schemas.openxmlformats.org/officeDocument/2006/relationships">
+  <p:cSld>
+    <p:spTree>
+      <p:nvGrpSpPr>
+        <p:cNvPr id="1" name=""/>
+        <p:cNvGrpSpPr/>
+        <p:nvPr/>
+      </p:nvGrpSpPr>
+      <p:grpSpPr/>
+      <p:sp>
+        <p:nvSpPr>
+          <p:cNvPr id="2" name="Rectangle 1"/>
+          <p:cNvSpPr/>
+          <p:nvPr/>
+        </p:nvSpPr>
+        <p:spPr>
+          <a:xfrm>
+            <a:off x="0" y="0"/>
+            <a:ext cx="12191695" cy="6858000"/>
+          </a:xfrm>
+          <a:prstGeom prst="rect">
+            <a:avLst/>
+          </a:prstGeom>
+          <a:solidFill>
+            <a:srgbClr val="0F172A"/>
+          </a:solidFill>
+          <a:ln>
+            <a:noFill/>
+          </a:ln>
+        </p:spPr>
+        <p:style>
+          <a:lnRef idx="1">
+            <a:schemeClr val="accent1"/>
+          </a:lnRef>
+          <a:fillRef idx="3">
+            <a:schemeClr val="accent1"/>
+          </a:fillRef>
+          <a:effectRef idx="2">
+            <a:schemeClr val="accent1"/>
+          </a:effectRef>
+          <a:fontRef idx="minor">
+            <a:schemeClr val="lt1"/>
+          </a:fontRef>
+        </p:style>
+        <p:txBody>
+          <a:bodyPr rtlCol="0" anchor="ctr"/>
+          <a:lstStyle/>
+          <a:p>
+            <a:pPr algn="ctr"/>
+          </a:p>
+        </p:txBody>
+      </p:sp>
+      <p:sp>
+        <p:nvSpPr>
+          <p:cNvPr id="3" name="TextBox 2"/>
+          <p:cNvSpPr txBox="1"/>
+          <p:nvPr/>
+        </p:nvSpPr>
+        <p:spPr>
+          <a:xfrm>
+            <a:off x="731520" y="365760"/>
+            <a:ext cx="10728655" cy="1005840"/>
+          </a:xfrm>
+          <a:prstGeom prst="rect">
+            <a:avLst/>
+          </a:prstGeom>
+          <a:noFill/>
+        </p:spPr>
+        <p:txBody>
+          <a:bodyPr wrap="square">
+            <a:spAutoFit/>
+          </a:bodyPr>
+          <a:lstStyle/>
+          <a:p>
+            <a:pPr>
+              <a:defRPr sz="1100" b="1">
+                <a:solidFill>
+                  <a:srgbClr val="2563EB"/>
+                </a:solidFill>
+              </a:defRPr>
+            </a:pPr>
+            <a:r>
+              <a:t>SYSTEM VERIFICATION &amp; LIVE TELEMETRY • SLIDE 12</a:t>
+            </a:r>
+          </a:p>
+          <a:p>
+            <a:pPr>
+              <a:defRPr sz="2200" b="1">
+                <a:solidFill>
+                  <a:srgbClr val="F8FAFC"/>
+                </a:solidFill>
+              </a:defRPr>
+            </a:pPr>
+            <a:r>
+              <a:t>Live UI: Multi-Factor Cardiovascular Radar Profile</a:t>
+            </a:r>
+          </a:p>
+        </p:txBody>
+      </p:sp>
+      <p:pic>
+        <p:nvPicPr>
+          <p:cNvPr id="4" name="Picture 3" descr="05_cardiovascular_radar_profile.png"/>
+          <p:cNvPicPr>
+            <a:picLocks noChangeAspect="1"/>
+          </p:cNvPicPr>
+          <p:nvPr/>
+        </p:nvPicPr>
+        <p:blipFill>
+          <a:blip r:embed="rId2"/>
+          <a:stretch>
+            <a:fillRect/>
+          </a:stretch>
+        </p:blipFill>
+        <p:spPr>
+          <a:xfrm>
+            <a:off x="731520" y="1645920"/>
+            <a:ext cx="6949440" cy="4389120"/>
+          </a:xfrm>
+          <a:prstGeom prst="rect">
+            <a:avLst/>
+          </a:prstGeom>
+        </p:spPr>
+      </p:pic>
+      <p:sp>
+        <p:nvSpPr>
+          <p:cNvPr id="5" name="Rounded Rectangle 4"/>
+          <p:cNvSpPr/>
+          <p:nvPr/>
+        </p:nvSpPr>
+        <p:spPr>
+          <a:xfrm>
+            <a:off x="7955279" y="1645920"/>
+            <a:ext cx="3474720" cy="4389120"/>
+          </a:xfrm>
+          <a:prstGeom prst="roundRect">
+            <a:avLst/>
+          </a:prstGeom>
+          <a:solidFill>
+            <a:srgbClr val="1E293B"/>
+          </a:solidFill>
+          <a:ln w="19050">
+            <a:solidFill>
+              <a:srgbClr val="2563EB"/>
+            </a:solidFill>
+          </a:ln>
+        </p:spPr>
+        <p:style>
+          <a:lnRef idx="1">
+            <a:schemeClr val="accent1"/>
+          </a:lnRef>
+          <a:fillRef idx="3">
+            <a:schemeClr val="accent1"/>
+          </a:fillRef>
+          <a:effectRef idx="2">
+            <a:schemeClr val="accent1"/>
+          </a:effectRef>
+          <a:fontRef idx="minor">
+            <a:schemeClr val="lt1"/>
+          </a:fontRef>
+        </p:style>
+        <p:txBody>
+          <a:bodyPr rtlCol="0" anchor="ctr" wrap="square"/>
+          <a:lstStyle/>
+          <a:p>
+            <a:pPr algn="ctr">
+              <a:defRPr sz="1500" b="1">
+                <a:solidFill>
+                  <a:srgbClr val="2563EB"/>
+                </a:solidFill>
+              </a:defRPr>
+            </a:pPr>
+            <a:r>
+              <a:t>Radar Stress Geometry</a:t>
+            </a:r>
+          </a:p>
+          <a:p>
+            <a:pPr>
+              <a:defRPr sz="1100">
+                <a:solidFill>
+                  <a:srgbClr val="94A3B8"/>
+                </a:solidFill>
+              </a:defRPr>
+            </a:pPr>
+            <a:r>
+              <a:t>• Multi-axis radar chart displaying normalized stress across 5 core cardiovascular factors.</a:t>
+            </a:r>
+          </a:p>
+          <a:p>
+            <a:pPr>
+              <a:defRPr sz="1100">
+                <a:solidFill>
+                  <a:srgbClr val="94A3B8"/>
+                </a:solidFill>
+              </a:defRPr>
+            </a:pPr>
+            <a:r>
+              <a:t>• Simultaneously captures Age, Blood Pressure, Serum Cholesterol, Max HR, and ST Depression.</a:t>
+            </a:r>
+          </a:p>
+          <a:p>
+            <a:pPr>
+              <a:defRPr sz="1100">
+                <a:solidFill>
+                  <a:srgbClr val="94A3B8"/>
+                </a:solidFill>
+              </a:defRPr>
+            </a:pPr>
+            <a:r>
+              <a:t>• Intuitive geometric polygon footprint allows rapid assessment during clinical consultations.</a:t>
+            </a:r>
+          </a:p>
+          <a:p>
+            <a:pPr>
+              <a:defRPr sz="1100">
+                <a:solidFill>
+                  <a:srgbClr val="94A3B8"/>
+                </a:solidFill>
+              </a:defRPr>
+            </a:pPr>
+            <a:r>
+              <a:t>• Interactive tooltips display exact quantitative values upon hovering over vertices.</a:t>
+            </a:r>
+          </a:p>
+        </p:txBody>
+      </p:sp>
+    </p:spTree>
+  </p:cSld>
+  <p:clrMapOvr>
+    <a:masterClrMapping/>
+  </p:clrMapOvr>
+</p:sld>
+</file>
+
+<file path=ppt/slides/slide13.xml><?xml version="1.0" encoding="utf-8"?>
+<p:sld xmlns:a="http://schemas.openxmlformats.org/drawingml/2006/main" xmlns:p="http://schemas.openxmlformats.org/presentationml/2006/main" xmlns:r="http://schemas.openxmlformats.org/officeDocument/2006/relationships">
+  <p:cSld>
+    <p:spTree>
+      <p:nvGrpSpPr>
+        <p:cNvPr id="1" name=""/>
+        <p:cNvGrpSpPr/>
+        <p:nvPr/>
+      </p:nvGrpSpPr>
+      <p:grpSpPr/>
+      <p:sp>
+        <p:nvSpPr>
+          <p:cNvPr id="2" name="Rectangle 1"/>
+          <p:cNvSpPr/>
+          <p:nvPr/>
+        </p:nvSpPr>
+        <p:spPr>
+          <a:xfrm>
+            <a:off x="0" y="0"/>
+            <a:ext cx="12191695" cy="6858000"/>
+          </a:xfrm>
+          <a:prstGeom prst="rect">
+            <a:avLst/>
+          </a:prstGeom>
+          <a:solidFill>
+            <a:srgbClr val="0F172A"/>
+          </a:solidFill>
+          <a:ln>
+            <a:noFill/>
+          </a:ln>
+        </p:spPr>
+        <p:style>
+          <a:lnRef idx="1">
+            <a:schemeClr val="accent1"/>
+          </a:lnRef>
+          <a:fillRef idx="3">
+            <a:schemeClr val="accent1"/>
+          </a:fillRef>
+          <a:effectRef idx="2">
+            <a:schemeClr val="accent1"/>
+          </a:effectRef>
+          <a:fontRef idx="minor">
+            <a:schemeClr val="lt1"/>
+          </a:fontRef>
+        </p:style>
+        <p:txBody>
+          <a:bodyPr rtlCol="0" anchor="ctr"/>
+          <a:lstStyle/>
+          <a:p>
+            <a:pPr algn="ctr"/>
+          </a:p>
+        </p:txBody>
+      </p:sp>
+      <p:sp>
+        <p:nvSpPr>
+          <p:cNvPr id="3" name="TextBox 2"/>
+          <p:cNvSpPr txBox="1"/>
+          <p:nvPr/>
+        </p:nvSpPr>
+        <p:spPr>
+          <a:xfrm>
+            <a:off x="731520" y="365760"/>
+            <a:ext cx="10728655" cy="1005840"/>
+          </a:xfrm>
+          <a:prstGeom prst="rect">
+            <a:avLst/>
+          </a:prstGeom>
+          <a:noFill/>
+        </p:spPr>
+        <p:txBody>
+          <a:bodyPr wrap="square">
+            <a:spAutoFit/>
+          </a:bodyPr>
+          <a:lstStyle/>
+          <a:p>
+            <a:pPr>
+              <a:defRPr sz="1100" b="1">
+                <a:solidFill>
+                  <a:srgbClr val="2563EB"/>
+                </a:solidFill>
+              </a:defRPr>
+            </a:pPr>
+            <a:r>
+              <a:t>SYSTEM VERIFICATION &amp; LIVE TELEMETRY • SLIDE 13</a:t>
+            </a:r>
+          </a:p>
+          <a:p>
+            <a:pPr>
+              <a:defRPr sz="2200" b="1">
+                <a:solidFill>
+                  <a:srgbClr val="F8FAFC"/>
+                </a:solidFill>
+              </a:defRPr>
+            </a:pPr>
+            <a:r>
+              <a:t>Live UI: Risk Distribution &amp; Comprehensive Analytics</a:t>
+            </a:r>
+          </a:p>
+        </p:txBody>
+      </p:sp>
+      <p:pic>
+        <p:nvPicPr>
+          <p:cNvPr id="4" name="Picture 3" descr="06_risk_distribution_pie_trend.png"/>
+          <p:cNvPicPr>
+            <a:picLocks noChangeAspect="1"/>
+          </p:cNvPicPr>
+          <p:nvPr/>
+        </p:nvPicPr>
+        <p:blipFill>
+          <a:blip r:embed="rId2"/>
+          <a:stretch>
+            <a:fillRect/>
+          </a:stretch>
+        </p:blipFill>
+        <p:spPr>
+          <a:xfrm>
+            <a:off x="731520" y="1645920"/>
+            <a:ext cx="6949440" cy="4389120"/>
+          </a:xfrm>
+          <a:prstGeom prst="rect">
+            <a:avLst/>
+          </a:prstGeom>
+        </p:spPr>
+      </p:pic>
+      <p:sp>
+        <p:nvSpPr>
+          <p:cNvPr id="5" name="Rounded Rectangle 4"/>
+          <p:cNvSpPr/>
+          <p:nvPr/>
+        </p:nvSpPr>
+        <p:spPr>
+          <a:xfrm>
+            <a:off x="7955279" y="1645920"/>
+            <a:ext cx="3474720" cy="4389120"/>
+          </a:xfrm>
+          <a:prstGeom prst="roundRect">
+            <a:avLst/>
+          </a:prstGeom>
+          <a:solidFill>
+            <a:srgbClr val="1E293B"/>
+          </a:solidFill>
+          <a:ln w="19050">
+            <a:solidFill>
+              <a:srgbClr val="2563EB"/>
+            </a:solidFill>
+          </a:ln>
+        </p:spPr>
+        <p:style>
+          <a:lnRef idx="1">
+            <a:schemeClr val="accent1"/>
+          </a:lnRef>
+          <a:fillRef idx="3">
+            <a:schemeClr val="accent1"/>
+          </a:fillRef>
+          <a:effectRef idx="2">
+            <a:schemeClr val="accent1"/>
+          </a:effectRef>
+          <a:fontRef idx="minor">
+            <a:schemeClr val="lt1"/>
+          </a:fontRef>
+        </p:style>
+        <p:txBody>
+          <a:bodyPr rtlCol="0" anchor="ctr" wrap="square"/>
+          <a:lstStyle/>
+          <a:p>
+            <a:pPr algn="ctr">
+              <a:defRPr sz="1500" b="1">
+                <a:solidFill>
+                  <a:srgbClr val="2563EB"/>
+                </a:solidFill>
+              </a:defRPr>
+            </a:pPr>
+            <a:r>
+              <a:t>Health Analytics Suite</a:t>
+            </a:r>
+          </a:p>
+          <a:p>
+            <a:pPr>
+              <a:defRPr sz="1100">
+                <a:solidFill>
+                  <a:srgbClr val="94A3B8"/>
+                </a:solidFill>
+              </a:defRPr>
+            </a:pPr>
+            <a:r>
+              <a:t>• Pie chart visualizing proportional risk distribution between healthy tissue and ischemia.</a:t>
+            </a:r>
+          </a:p>
+          <a:p>
+            <a:pPr>
+              <a:defRPr sz="1100">
+                <a:solidFill>
+                  <a:srgbClr val="94A3B8"/>
+                </a:solidFill>
+              </a:defRPr>
+            </a:pPr>
+            <a:r>
+              <a:t>• Integrated trend analysis modeling cardiovascular stress under variable exertion loads.</a:t>
+            </a:r>
+          </a:p>
+          <a:p>
+            <a:pPr>
+              <a:defRPr sz="1100">
+                <a:solidFill>
+                  <a:srgbClr val="94A3B8"/>
+                </a:solidFill>
+              </a:defRPr>
+            </a:pPr>
+            <a:r>
+              <a:t>• Harmonized chart color palettes supporting both light mode and dark mode operation.</a:t>
+            </a:r>
+          </a:p>
+          <a:p>
+            <a:pPr>
+              <a:defRPr sz="1100">
+                <a:solidFill>
+                  <a:srgbClr val="94A3B8"/>
+                </a:solidFill>
+              </a:defRPr>
+            </a:pPr>
+            <a:r>
+              <a:t>• Provides clear visual evidence for patient counseling and preventive lifestyle planning.</a:t>
+            </a:r>
+          </a:p>
+        </p:txBody>
+      </p:sp>
+    </p:spTree>
+  </p:cSld>
+  <p:clrMapOvr>
+    <a:masterClrMapping/>
+  </p:clrMapOvr>
+</p:sld>
+</file>
+
+<file path=ppt/slides/slide14.xml><?xml version="1.0" encoding="utf-8"?>
+<p:sld xmlns:a="http://schemas.openxmlformats.org/drawingml/2006/main" xmlns:p="http://schemas.openxmlformats.org/presentationml/2006/main" xmlns:r="http://schemas.openxmlformats.org/officeDocument/2006/relationships">
+  <p:cSld>
+    <p:spTree>
+      <p:nvGrpSpPr>
+        <p:cNvPr id="1" name=""/>
+        <p:cNvGrpSpPr/>
+        <p:nvPr/>
+      </p:nvGrpSpPr>
+      <p:grpSpPr/>
+      <p:sp>
+        <p:nvSpPr>
+          <p:cNvPr id="2" name="Rectangle 1"/>
+          <p:cNvSpPr/>
+          <p:nvPr/>
+        </p:nvSpPr>
+        <p:spPr>
+          <a:xfrm>
+            <a:off x="0" y="0"/>
+            <a:ext cx="12191695" cy="6858000"/>
+          </a:xfrm>
+          <a:prstGeom prst="rect">
+            <a:avLst/>
+          </a:prstGeom>
+          <a:solidFill>
+            <a:srgbClr val="0F172A"/>
+          </a:solidFill>
+          <a:ln>
+            <a:noFill/>
+          </a:ln>
+        </p:spPr>
+        <p:style>
+          <a:lnRef idx="1">
+            <a:schemeClr val="accent1"/>
+          </a:lnRef>
+          <a:fillRef idx="3">
+            <a:schemeClr val="accent1"/>
+          </a:fillRef>
+          <a:effectRef idx="2">
+            <a:schemeClr val="accent1"/>
+          </a:effectRef>
+          <a:fontRef idx="minor">
+            <a:schemeClr val="lt1"/>
+          </a:fontRef>
+        </p:style>
+        <p:txBody>
+          <a:bodyPr rtlCol="0" anchor="ctr"/>
+          <a:lstStyle/>
+          <a:p>
+            <a:pPr algn="ctr"/>
+          </a:p>
+        </p:txBody>
+      </p:sp>
+      <p:sp>
+        <p:nvSpPr>
+          <p:cNvPr id="3" name="TextBox 2"/>
+          <p:cNvSpPr txBox="1"/>
+          <p:nvPr/>
+        </p:nvSpPr>
+        <p:spPr>
+          <a:xfrm>
+            <a:off x="731520" y="365760"/>
+            <a:ext cx="10728655" cy="1005840"/>
+          </a:xfrm>
+          <a:prstGeom prst="rect">
+            <a:avLst/>
+          </a:prstGeom>
+          <a:noFill/>
+        </p:spPr>
+        <p:txBody>
+          <a:bodyPr wrap="square">
+            <a:spAutoFit/>
+          </a:bodyPr>
+          <a:lstStyle/>
+          <a:p>
+            <a:pPr>
+              <a:defRPr sz="1100" b="1">
+                <a:solidFill>
+                  <a:srgbClr val="2563EB"/>
+                </a:solidFill>
+              </a:defRPr>
+            </a:pPr>
+            <a:r>
+              <a:t>HEALTHCARE AI &amp; CARDIOVASCULAR DIAGNOSTICS</a:t>
+            </a:r>
+          </a:p>
+          <a:p>
+            <a:pPr>
+              <a:defRPr sz="2200" b="1">
+                <a:solidFill>
+                  <a:srgbClr val="F8FAFC"/>
+                </a:solidFill>
+              </a:defRPr>
+            </a:pPr>
+            <a:r>
+              <a:t>Experimental Results &amp; Multi-Model Comparative Evaluation</a:t>
+            </a:r>
+          </a:p>
+        </p:txBody>
+      </p:sp>
+      <p:graphicFrame>
+        <p:nvGraphicFramePr>
+          <p:cNvPr id="4" name="Table 3"/>
+          <p:cNvGraphicFramePr>
+            <a:graphicFrameLocks noGrp="1"/>
+          </p:cNvGraphicFramePr>
+          <p:nvPr/>
+        </p:nvGraphicFramePr>
+        <p:xfrm>
+          <a:off x="731520" y="1645920"/>
+          <a:ext cx="10728655" cy="4389120"/>
+        </p:xfrm>
+        <a:graphic>
+          <a:graphicData uri="http://schemas.openxmlformats.org/drawingml/2006/table">
+            <a:tbl>
+              <a:tblPr firstRow="1" bandRow="1">
+                <a:tableStyleId>{5C22544A-7EE6-4342-B048-85BDC9FD1C3A}</a:tableStyleId>
+              </a:tblPr>
+              <a:tblGrid>
+                <a:gridCol w="2286000"/>
+                <a:gridCol w="1645920"/>
+                <a:gridCol w="1645920"/>
+                <a:gridCol w="1645920"/>
+                <a:gridCol w="1645920"/>
+                <a:gridCol w="1858975"/>
+              </a:tblGrid>
+              <a:tr h="877824">
+                <a:tc>
+                  <a:txBody>
+                    <a:bodyPr/>
+                    <a:lstStyle/>
+                    <a:p>
+                      <a:pPr>
+                        <a:defRPr b="1" sz="1200">
+                          <a:solidFill>
+                            <a:srgbClr val="F8FAFC"/>
+                          </a:solidFill>
+                        </a:defRPr>
+                      </a:pPr>
+                      <a:r>
+                        <a:t>Model Architecture</a:t>
+                      </a:r>
+                    </a:p>
+                  </a:txBody>
+                  <a:tcPr>
+                    <a:solidFill>
+                      <a:srgbClr val="2563EB"/>
+                    </a:solidFill>
+                  </a:tcPr>
+                </a:tc>
+                <a:tc>
+                  <a:txBody>
+                    <a:bodyPr/>
+                    <a:lstStyle/>
+                    <a:p>
+                      <a:pPr>
+                        <a:defRPr b="1" sz="1200">
+                          <a:solidFill>
+                            <a:srgbClr val="F8FAFC"/>
+                          </a:solidFill>
+                        </a:defRPr>
+                      </a:pPr>
+                      <a:r>
+                        <a:t>Accuracy</a:t>
+                      </a:r>
+                    </a:p>
+                  </a:txBody>
+                  <a:tcPr>
+                    <a:solidFill>
+                      <a:srgbClr val="2563EB"/>
+                    </a:solidFill>
+                  </a:tcPr>
+                </a:tc>
+                <a:tc>
+                  <a:txBody>
+                    <a:bodyPr/>
+                    <a:lstStyle/>
+                    <a:p>
+                      <a:pPr>
+                        <a:defRPr b="1" sz="1200">
+                          <a:solidFill>
+                            <a:srgbClr val="F8FAFC"/>
+                          </a:solidFill>
+                        </a:defRPr>
+                      </a:pPr>
+                      <a:r>
+                        <a:t>Precision</a:t>
+                      </a:r>
+                    </a:p>
+                  </a:txBody>
+                  <a:tcPr>
+                    <a:solidFill>
+                      <a:srgbClr val="2563EB"/>
+                    </a:solidFill>
+                  </a:tcPr>
+                </a:tc>
+                <a:tc>
+                  <a:txBody>
+                    <a:bodyPr/>
+                    <a:lstStyle/>
+                    <a:p>
+                      <a:pPr>
+                        <a:defRPr b="1" sz="1200">
+                          <a:solidFill>
+                            <a:srgbClr val="F8FAFC"/>
+                          </a:solidFill>
+                        </a:defRPr>
+                      </a:pPr>
+                      <a:r>
+                        <a:t>Recall</a:t>
+                      </a:r>
+                    </a:p>
+                  </a:txBody>
+                  <a:tcPr>
+                    <a:solidFill>
+                      <a:srgbClr val="2563EB"/>
+                    </a:solidFill>
+                  </a:tcPr>
+                </a:tc>
+                <a:tc>
+                  <a:txBody>
+                    <a:bodyPr/>
+                    <a:lstStyle/>
+                    <a:p>
+                      <a:pPr>
+                        <a:defRPr b="1" sz="1200">
+                          <a:solidFill>
+                            <a:srgbClr val="F8FAFC"/>
+                          </a:solidFill>
+                        </a:defRPr>
+                      </a:pPr>
+                      <a:r>
+                        <a:t>F1-Score</a:t>
+                      </a:r>
+                    </a:p>
+                  </a:txBody>
+                  <a:tcPr>
+                    <a:solidFill>
+                      <a:srgbClr val="2563EB"/>
+                    </a:solidFill>
+                  </a:tcPr>
+                </a:tc>
+                <a:tc>
+                  <a:txBody>
+                    <a:bodyPr/>
+                    <a:lstStyle/>
+                    <a:p>
+                      <a:pPr>
+                        <a:defRPr b="1" sz="1200">
+                          <a:solidFill>
+                            <a:srgbClr val="F8FAFC"/>
+                          </a:solidFill>
+                        </a:defRPr>
+                      </a:pPr>
+                      <a:r>
+                        <a:t>Inference Latency</a:t>
+                      </a:r>
+                    </a:p>
+                  </a:txBody>
+                  <a:tcPr>
+                    <a:solidFill>
+                      <a:srgbClr val="2563EB"/>
+                    </a:solidFill>
+                  </a:tcPr>
+                </a:tc>
+              </a:tr>
+              <a:tr h="877824">
+                <a:tc>
+                  <a:txBody>
+                    <a:bodyPr/>
+                    <a:lstStyle/>
+                    <a:p>
+                      <a:pPr>
+                        <a:defRPr sz="1100">
+                          <a:solidFill>
+                            <a:srgbClr val="10B981"/>
+                          </a:solidFill>
+                        </a:defRPr>
+                      </a:pPr>
+                      <a:r>
+                        <a:t>Random Forest (100 Trees - Selected)</a:t>
+                      </a:r>
+                    </a:p>
+                  </a:txBody>
+                  <a:tcPr>
+                    <a:solidFill>
+                      <a:srgbClr val="1E293B"/>
+                    </a:solidFill>
+                  </a:tcPr>
+                </a:tc>
+                <a:tc>
+                  <a:txBody>
+                    <a:bodyPr/>
+                    <a:lstStyle/>
+                    <a:p>
+                      <a:pPr>
+                        <a:defRPr sz="1100">
+                          <a:solidFill>
+                            <a:srgbClr val="10B981"/>
+                          </a:solidFill>
+                        </a:defRPr>
+                      </a:pPr>
+                      <a:r>
+                        <a:t>89.1%</a:t>
+                      </a:r>
+                    </a:p>
+                  </a:txBody>
+                  <a:tcPr>
+                    <a:solidFill>
+                      <a:srgbClr val="1E293B"/>
+                    </a:solidFill>
+                  </a:tcPr>
+                </a:tc>
+                <a:tc>
+                  <a:txBody>
+                    <a:bodyPr/>
+                    <a:lstStyle/>
+                    <a:p>
+                      <a:pPr>
+                        <a:defRPr sz="1100">
+                          <a:solidFill>
+                            <a:srgbClr val="10B981"/>
+                          </a:solidFill>
+                        </a:defRPr>
+                      </a:pPr>
+                      <a:r>
+                        <a:t>89.8%</a:t>
+                      </a:r>
+                    </a:p>
+                  </a:txBody>
+                  <a:tcPr>
+                    <a:solidFill>
+                      <a:srgbClr val="1E293B"/>
+                    </a:solidFill>
+                  </a:tcPr>
+                </a:tc>
+                <a:tc>
+                  <a:txBody>
+                    <a:bodyPr/>
+                    <a:lstStyle/>
+                    <a:p>
+                      <a:pPr>
+                        <a:defRPr sz="1100">
+                          <a:solidFill>
+                            <a:srgbClr val="10B981"/>
+                          </a:solidFill>
+                        </a:defRPr>
+                      </a:pPr>
+                      <a:r>
+                        <a:t>88.4%</a:t>
+                      </a:r>
+                    </a:p>
+                  </a:txBody>
+                  <a:tcPr>
+                    <a:solidFill>
+                      <a:srgbClr val="1E293B"/>
+                    </a:solidFill>
+                  </a:tcPr>
+                </a:tc>
+                <a:tc>
+                  <a:txBody>
+                    <a:bodyPr/>
+                    <a:lstStyle/>
+                    <a:p>
+                      <a:pPr>
+                        <a:defRPr sz="1100">
+                          <a:solidFill>
+                            <a:srgbClr val="10B981"/>
+                          </a:solidFill>
+                        </a:defRPr>
+                      </a:pPr>
+                      <a:r>
+                        <a:t>89.1%</a:t>
+                      </a:r>
+                    </a:p>
+                  </a:txBody>
+                  <a:tcPr>
+                    <a:solidFill>
+                      <a:srgbClr val="1E293B"/>
+                    </a:solidFill>
+                  </a:tcPr>
+                </a:tc>
+                <a:tc>
+                  <a:txBody>
+                    <a:bodyPr/>
+                    <a:lstStyle/>
+                    <a:p>
+                      <a:pPr>
+                        <a:defRPr sz="1100">
+                          <a:solidFill>
+                            <a:srgbClr val="10B981"/>
+                          </a:solidFill>
+                        </a:defRPr>
+                      </a:pPr>
+                      <a:r>
+                        <a:t>1.8 ms / req</a:t>
+                      </a:r>
+                    </a:p>
+                  </a:txBody>
+                  <a:tcPr>
+                    <a:solidFill>
+                      <a:srgbClr val="1E293B"/>
+                    </a:solidFill>
+                  </a:tcPr>
+                </a:tc>
+              </a:tr>
+              <a:tr h="877824">
+                <a:tc>
+                  <a:txBody>
+                    <a:bodyPr/>
+                    <a:lstStyle/>
+                    <a:p>
+                      <a:pPr>
+                        <a:defRPr sz="1100">
+                          <a:solidFill>
+                            <a:srgbClr val="F8FAFC"/>
+                          </a:solidFill>
+                        </a:defRPr>
+                      </a:pPr>
+                      <a:r>
+                        <a:t>Logistic Regression (L2)</a:t>
+                      </a:r>
+                    </a:p>
+                  </a:txBody>
+                  <a:tcPr>
+                    <a:solidFill>
+                      <a:srgbClr val="1E293B"/>
+                    </a:solidFill>
+                  </a:tcPr>
+                </a:tc>
+                <a:tc>
+                  <a:txBody>
+                    <a:bodyPr/>
+                    <a:lstStyle/>
+                    <a:p>
+                      <a:pPr>
+                        <a:defRPr sz="1100">
+                          <a:solidFill>
+                            <a:srgbClr val="94A3B8"/>
+                          </a:solidFill>
+                        </a:defRPr>
+                      </a:pPr>
+                      <a:r>
+                        <a:t>86.4%</a:t>
+                      </a:r>
+                    </a:p>
+                  </a:txBody>
+                  <a:tcPr>
+                    <a:solidFill>
+                      <a:srgbClr val="1E293B"/>
+                    </a:solidFill>
+                  </a:tcPr>
+                </a:tc>
+                <a:tc>
+                  <a:txBody>
+                    <a:bodyPr/>
+                    <a:lstStyle/>
+                    <a:p>
+                      <a:pPr>
+                        <a:defRPr sz="1100">
+                          <a:solidFill>
+                            <a:srgbClr val="94A3B8"/>
+                          </a:solidFill>
+                        </a:defRPr>
+                      </a:pPr>
+                      <a:r>
+                        <a:t>87.1%</a:t>
+                      </a:r>
+                    </a:p>
+                  </a:txBody>
+                  <a:tcPr>
+                    <a:solidFill>
+                      <a:srgbClr val="1E293B"/>
+                    </a:solidFill>
+                  </a:tcPr>
+                </a:tc>
+                <a:tc>
+                  <a:txBody>
+                    <a:bodyPr/>
+                    <a:lstStyle/>
+                    <a:p>
+                      <a:pPr>
+                        <a:defRPr sz="1100">
+                          <a:solidFill>
+                            <a:srgbClr val="94A3B8"/>
+                          </a:solidFill>
+                        </a:defRPr>
+                      </a:pPr>
+                      <a:r>
+                        <a:t>85.6%</a:t>
+                      </a:r>
+                    </a:p>
+                  </a:txBody>
+                  <a:tcPr>
+                    <a:solidFill>
+                      <a:srgbClr val="1E293B"/>
+                    </a:solidFill>
+                  </a:tcPr>
+                </a:tc>
+                <a:tc>
+                  <a:txBody>
+                    <a:bodyPr/>
+                    <a:lstStyle/>
+                    <a:p>
+                      <a:pPr>
+                        <a:defRPr sz="1100">
+                          <a:solidFill>
+                            <a:srgbClr val="94A3B8"/>
+                          </a:solidFill>
+                        </a:defRPr>
+                      </a:pPr>
+                      <a:r>
+                        <a:t>86.3%</a:t>
+                      </a:r>
+                    </a:p>
+                  </a:txBody>
+                  <a:tcPr>
+                    <a:solidFill>
+                      <a:srgbClr val="1E293B"/>
+                    </a:solidFill>
+                  </a:tcPr>
+                </a:tc>
+                <a:tc>
+                  <a:txBody>
+                    <a:bodyPr/>
+                    <a:lstStyle/>
+                    <a:p>
+                      <a:pPr>
+                        <a:defRPr sz="1100">
+                          <a:solidFill>
+                            <a:srgbClr val="94A3B8"/>
+                          </a:solidFill>
+                        </a:defRPr>
+                      </a:pPr>
+                      <a:r>
+                        <a:t>1.1 ms / req</a:t>
+                      </a:r>
+                    </a:p>
+                  </a:txBody>
+                  <a:tcPr>
+                    <a:solidFill>
+                      <a:srgbClr val="1E293B"/>
+                    </a:solidFill>
+                  </a:tcPr>
+                </a:tc>
+              </a:tr>
+              <a:tr h="877824">
+                <a:tc>
+                  <a:txBody>
+                    <a:bodyPr/>
+                    <a:lstStyle/>
+                    <a:p>
+                      <a:pPr>
+                        <a:defRPr sz="1100">
+                          <a:solidFill>
+                            <a:srgbClr val="F8FAFC"/>
+                          </a:solidFill>
+                        </a:defRPr>
+                      </a:pPr>
+                      <a:r>
+                        <a:t>K-Nearest Neighbors (k=7)</a:t>
+                      </a:r>
+                    </a:p>
+                  </a:txBody>
+                  <a:tcPr>
+                    <a:solidFill>
+                      <a:srgbClr val="1E293B"/>
+                    </a:solidFill>
+                  </a:tcPr>
+                </a:tc>
+                <a:tc>
+                  <a:txBody>
+                    <a:bodyPr/>
+                    <a:lstStyle/>
+                    <a:p>
+                      <a:pPr>
+                        <a:defRPr sz="1100">
+                          <a:solidFill>
+                            <a:srgbClr val="94A3B8"/>
+                          </a:solidFill>
+                        </a:defRPr>
+                      </a:pPr>
+                      <a:r>
+                        <a:t>83.2%</a:t>
+                      </a:r>
+                    </a:p>
+                  </a:txBody>
+                  <a:tcPr>
+                    <a:solidFill>
+                      <a:srgbClr val="1E293B"/>
+                    </a:solidFill>
+                  </a:tcPr>
+                </a:tc>
+                <a:tc>
+                  <a:txBody>
+                    <a:bodyPr/>
+                    <a:lstStyle/>
+                    <a:p>
+                      <a:pPr>
+                        <a:defRPr sz="1100">
+                          <a:solidFill>
+                            <a:srgbClr val="94A3B8"/>
+                          </a:solidFill>
+                        </a:defRPr>
+                      </a:pPr>
+                      <a:r>
+                        <a:t>84.0%</a:t>
+                      </a:r>
+                    </a:p>
+                  </a:txBody>
+                  <a:tcPr>
+                    <a:solidFill>
+                      <a:srgbClr val="1E293B"/>
+                    </a:solidFill>
+                  </a:tcPr>
+                </a:tc>
+                <a:tc>
+                  <a:txBody>
+                    <a:bodyPr/>
+                    <a:lstStyle/>
+                    <a:p>
+                      <a:pPr>
+                        <a:defRPr sz="1100">
+                          <a:solidFill>
+                            <a:srgbClr val="94A3B8"/>
+                          </a:solidFill>
+                        </a:defRPr>
+                      </a:pPr>
+                      <a:r>
+                        <a:t>82.1%</a:t>
+                      </a:r>
+                    </a:p>
+                  </a:txBody>
+                  <a:tcPr>
+                    <a:solidFill>
+                      <a:srgbClr val="1E293B"/>
+                    </a:solidFill>
+                  </a:tcPr>
+                </a:tc>
+                <a:tc>
+                  <a:txBody>
+                    <a:bodyPr/>
+                    <a:lstStyle/>
+                    <a:p>
+                      <a:pPr>
+                        <a:defRPr sz="1100">
+                          <a:solidFill>
+                            <a:srgbClr val="94A3B8"/>
+                          </a:solidFill>
+                        </a:defRPr>
+                      </a:pPr>
+                      <a:r>
+                        <a:t>83.0%</a:t>
+                      </a:r>
+                    </a:p>
+                  </a:txBody>
+                  <a:tcPr>
+                    <a:solidFill>
+                      <a:srgbClr val="1E293B"/>
+                    </a:solidFill>
+                  </a:tcPr>
+                </a:tc>
+                <a:tc>
+                  <a:txBody>
+                    <a:bodyPr/>
+                    <a:lstStyle/>
+                    <a:p>
+                      <a:pPr>
+                        <a:defRPr sz="1100">
+                          <a:solidFill>
+                            <a:srgbClr val="94A3B8"/>
+                          </a:solidFill>
+                        </a:defRPr>
+                      </a:pPr>
+                      <a:r>
+                        <a:t>3.5 ms / req</a:t>
+                      </a:r>
+                    </a:p>
+                  </a:txBody>
+                  <a:tcPr>
+                    <a:solidFill>
+                      <a:srgbClr val="1E293B"/>
+                    </a:solidFill>
+                  </a:tcPr>
+                </a:tc>
+              </a:tr>
+              <a:tr h="877824">
+                <a:tc>
+                  <a:txBody>
+                    <a:bodyPr/>
+                    <a:lstStyle/>
+                    <a:p>
+                      <a:pPr>
+                        <a:defRPr sz="1100">
+                          <a:solidFill>
+                            <a:srgbClr val="F8FAFC"/>
+                          </a:solidFill>
+                        </a:defRPr>
+                      </a:pPr>
+                      <a:r>
+                        <a:t>Decision Tree (CART)</a:t>
+                      </a:r>
+                    </a:p>
+                  </a:txBody>
+                  <a:tcPr>
+                    <a:solidFill>
+                      <a:srgbClr val="1E293B"/>
+                    </a:solidFill>
+                  </a:tcPr>
+                </a:tc>
+                <a:tc>
+                  <a:txBody>
+                    <a:bodyPr/>
+                    <a:lstStyle/>
+                    <a:p>
+                      <a:pPr>
+                        <a:defRPr sz="1100">
+                          <a:solidFill>
+                            <a:srgbClr val="94A3B8"/>
+                          </a:solidFill>
+                        </a:defRPr>
+                      </a:pPr>
+                      <a:r>
+                        <a:t>81.5%</a:t>
+                      </a:r>
+                    </a:p>
+                  </a:txBody>
+                  <a:tcPr>
+                    <a:solidFill>
+                      <a:srgbClr val="1E293B"/>
+                    </a:solidFill>
+                  </a:tcPr>
+                </a:tc>
+                <a:tc>
+                  <a:txBody>
+                    <a:bodyPr/>
+                    <a:lstStyle/>
+                    <a:p>
+                      <a:pPr>
+                        <a:defRPr sz="1100">
+                          <a:solidFill>
+                            <a:srgbClr val="94A3B8"/>
+                          </a:solidFill>
+                        </a:defRPr>
+                      </a:pPr>
+                      <a:r>
+                        <a:t>82.2%</a:t>
+                      </a:r>
+                    </a:p>
+                  </a:txBody>
+                  <a:tcPr>
+                    <a:solidFill>
+                      <a:srgbClr val="1E293B"/>
+                    </a:solidFill>
+                  </a:tcPr>
+                </a:tc>
+                <a:tc>
+                  <a:txBody>
+                    <a:bodyPr/>
+                    <a:lstStyle/>
+                    <a:p>
+                      <a:pPr>
+                        <a:defRPr sz="1100">
+                          <a:solidFill>
+                            <a:srgbClr val="94A3B8"/>
+                          </a:solidFill>
+                        </a:defRPr>
+                      </a:pPr>
+                      <a:r>
+                        <a:t>80.7%</a:t>
+                      </a:r>
+                    </a:p>
+                  </a:txBody>
+                  <a:tcPr>
+                    <a:solidFill>
+                      <a:srgbClr val="1E293B"/>
+                    </a:solidFill>
+                  </a:tcPr>
+                </a:tc>
+                <a:tc>
+                  <a:txBody>
+                    <a:bodyPr/>
+                    <a:lstStyle/>
+                    <a:p>
+                      <a:pPr>
+                        <a:defRPr sz="1100">
+                          <a:solidFill>
+                            <a:srgbClr val="94A3B8"/>
+                          </a:solidFill>
+                        </a:defRPr>
+                      </a:pPr>
+                      <a:r>
+                        <a:t>81.4%</a:t>
+                      </a:r>
+                    </a:p>
+                  </a:txBody>
+                  <a:tcPr>
+                    <a:solidFill>
+                      <a:srgbClr val="1E293B"/>
+                    </a:solidFill>
+                  </a:tcPr>
+                </a:tc>
+                <a:tc>
+                  <a:txBody>
+                    <a:bodyPr/>
+                    <a:lstStyle/>
+                    <a:p>
+                      <a:pPr>
+                        <a:defRPr sz="1100">
+                          <a:solidFill>
+                            <a:srgbClr val="94A3B8"/>
+                          </a:solidFill>
+                        </a:defRPr>
+                      </a:pPr>
+                      <a:r>
+                        <a:t>0.9 ms / req</a:t>
+                      </a:r>
+                    </a:p>
+                  </a:txBody>
+                  <a:tcPr>
+                    <a:solidFill>
+                      <a:srgbClr val="1E293B"/>
+                    </a:solidFill>
+                  </a:tcPr>
+                </a:tc>
+              </a:tr>
+            </a:tbl>
+          </a:graphicData>
+        </a:graphic>
+      </p:graphicFrame>
+    </p:spTree>
+  </p:cSld>
+  <p:clrMapOvr>
+    <a:masterClrMapping/>
+  </p:clrMapOvr>
+</p:sld>
+</file>
+
+<file path=ppt/slides/slide15.xml><?xml version="1.0" encoding="utf-8"?>
+<p:sld xmlns:a="http://schemas.openxmlformats.org/drawingml/2006/main" xmlns:p="http://schemas.openxmlformats.org/presentationml/2006/main" xmlns:r="http://schemas.openxmlformats.org/officeDocument/2006/relationships">
+  <p:cSld>
+    <p:spTree>
+      <p:nvGrpSpPr>
+        <p:cNvPr id="1" name=""/>
+        <p:cNvGrpSpPr/>
+        <p:nvPr/>
+      </p:nvGrpSpPr>
+      <p:grpSpPr/>
+      <p:sp>
+        <p:nvSpPr>
+          <p:cNvPr id="2" name="Rectangle 1"/>
+          <p:cNvSpPr/>
+          <p:nvPr/>
+        </p:nvSpPr>
+        <p:spPr>
+          <a:xfrm>
+            <a:off x="0" y="0"/>
+            <a:ext cx="12191695" cy="6858000"/>
+          </a:xfrm>
+          <a:prstGeom prst="rect">
+            <a:avLst/>
+          </a:prstGeom>
+          <a:solidFill>
+            <a:srgbClr val="0F172A"/>
+          </a:solidFill>
+          <a:ln>
+            <a:noFill/>
+          </a:ln>
+        </p:spPr>
+        <p:style>
+          <a:lnRef idx="1">
+            <a:schemeClr val="accent1"/>
+          </a:lnRef>
+          <a:fillRef idx="3">
+            <a:schemeClr val="accent1"/>
+          </a:fillRef>
+          <a:effectRef idx="2">
+            <a:schemeClr val="accent1"/>
+          </a:effectRef>
+          <a:fontRef idx="minor">
+            <a:schemeClr val="lt1"/>
+          </a:fontRef>
+        </p:style>
+        <p:txBody>
+          <a:bodyPr rtlCol="0" anchor="ctr"/>
+          <a:lstStyle/>
+          <a:p>
+            <a:pPr algn="ctr"/>
+          </a:p>
+        </p:txBody>
+      </p:sp>
+      <p:sp>
+        <p:nvSpPr>
+          <p:cNvPr id="3" name="TextBox 2"/>
+          <p:cNvSpPr txBox="1"/>
+          <p:nvPr/>
+        </p:nvSpPr>
+        <p:spPr>
+          <a:xfrm>
+            <a:off x="731520" y="365760"/>
+            <a:ext cx="10728655" cy="1005840"/>
+          </a:xfrm>
+          <a:prstGeom prst="rect">
+            <a:avLst/>
+          </a:prstGeom>
+          <a:noFill/>
+        </p:spPr>
+        <p:txBody>
+          <a:bodyPr wrap="square">
+            <a:spAutoFit/>
+          </a:bodyPr>
+          <a:lstStyle/>
+          <a:p>
+            <a:pPr>
+              <a:defRPr sz="1100" b="1">
+                <a:solidFill>
+                  <a:srgbClr val="2563EB"/>
+                </a:solidFill>
+              </a:defRPr>
+            </a:pPr>
+            <a:r>
+              <a:t>HEALTHCARE AI &amp; CARDIOVASCULAR DIAGNOSTICS</a:t>
+            </a:r>
+          </a:p>
+          <a:p>
+            <a:pPr>
+              <a:defRPr sz="2200" b="1">
+                <a:solidFill>
+                  <a:srgbClr val="F8FAFC"/>
+                </a:solidFill>
+              </a:defRPr>
+            </a:pPr>
+            <a:r>
+              <a:t>Deployment Architecture, Defense Summary &amp; Submission Readiness</a:t>
+            </a:r>
+          </a:p>
+        </p:txBody>
+      </p:sp>
+      <p:sp>
+        <p:nvSpPr>
+          <p:cNvPr id="4" name="Rounded Rectangle 3"/>
+          <p:cNvSpPr/>
+          <p:nvPr/>
+        </p:nvSpPr>
+        <p:spPr>
+          <a:xfrm>
+            <a:off x="731520" y="1645920"/>
+            <a:ext cx="3429000" cy="4572000"/>
+          </a:xfrm>
+          <a:prstGeom prst="roundRect">
+            <a:avLst/>
+          </a:prstGeom>
+          <a:solidFill>
+            <a:srgbClr val="1E293B"/>
+          </a:solidFill>
+          <a:ln w="19050">
+            <a:solidFill>
+              <a:srgbClr val="2563EB"/>
+            </a:solidFill>
+          </a:ln>
+        </p:spPr>
+        <p:style>
+          <a:lnRef idx="1">
+            <a:schemeClr val="accent1"/>
+          </a:lnRef>
+          <a:fillRef idx="3">
+            <a:schemeClr val="accent1"/>
+          </a:fillRef>
+          <a:effectRef idx="2">
+            <a:schemeClr val="accent1"/>
+          </a:effectRef>
+          <a:fontRef idx="minor">
+            <a:schemeClr val="lt1"/>
+          </a:fontRef>
+        </p:style>
+        <p:txBody>
+          <a:bodyPr rtlCol="0" anchor="ctr" wrap="square"/>
+          <a:lstStyle/>
+          <a:p>
+            <a:pPr algn="ctr">
+              <a:defRPr sz="1600" b="1">
+                <a:solidFill>
+                  <a:srgbClr val="2563EB"/>
+                </a:solidFill>
+              </a:defRPr>
+            </a:pPr>
+            <a:r>
+              <a:t>Production Architecture</a:t>
+            </a:r>
+          </a:p>
+          <a:p>
+            <a:pPr>
+              <a:defRPr sz="1200">
+                <a:solidFill>
+                  <a:srgbClr val="94A3B8"/>
+                </a:solidFill>
+              </a:defRPr>
+            </a:pPr>
+            <a:r>
+              <a:t>• Full-stack microservice running on dedicated Port 5015.</a:t>
+            </a:r>
+          </a:p>
+          <a:p>
+            <a:pPr>
+              <a:defRPr sz="1200">
+                <a:solidFill>
+                  <a:srgbClr val="94A3B8"/>
+                </a:solidFill>
+              </a:defRPr>
+            </a:pPr>
+            <a:r>
+              <a:t>• Pre-compiled React single-page frontend bundled in frontend/dist.</a:t>
+            </a:r>
+          </a:p>
+          <a:p>
+            <a:pPr>
+              <a:defRPr sz="1200">
+                <a:solidFill>
+                  <a:srgbClr val="94A3B8"/>
+                </a:solidFill>
+              </a:defRPr>
+            </a:pPr>
+            <a:r>
+              <a:t>• ReportLab dynamic PDF engine generating physician-ready reports on demand.</a:t>
+            </a:r>
+          </a:p>
+          <a:p>
+            <a:pPr>
+              <a:defRPr sz="1200">
+                <a:solidFill>
+                  <a:srgbClr val="94A3B8"/>
+                </a:solidFill>
+              </a:defRPr>
+            </a:pPr>
+            <a:r>
+              <a:t>• SQLite transactional patient database (heart_patients.db) with index tracking.</a:t>
+            </a:r>
+          </a:p>
+        </p:txBody>
+      </p:sp>
+      <p:sp>
+        <p:nvSpPr>
+          <p:cNvPr id="5" name="Rounded Rectangle 4"/>
+          <p:cNvSpPr/>
+          <p:nvPr/>
+        </p:nvSpPr>
+        <p:spPr>
+          <a:xfrm>
+            <a:off x="4343400" y="1645920"/>
+            <a:ext cx="3429000" cy="4572000"/>
+          </a:xfrm>
+          <a:prstGeom prst="roundRect">
+            <a:avLst/>
+          </a:prstGeom>
+          <a:solidFill>
+            <a:srgbClr val="1E293B"/>
+          </a:solidFill>
+          <a:ln w="19050">
+            <a:solidFill>
+              <a:srgbClr val="10B981"/>
+            </a:solidFill>
+          </a:ln>
+        </p:spPr>
+        <p:style>
+          <a:lnRef idx="1">
+            <a:schemeClr val="accent1"/>
+          </a:lnRef>
+          <a:fillRef idx="3">
+            <a:schemeClr val="accent1"/>
+          </a:fillRef>
+          <a:effectRef idx="2">
+            <a:schemeClr val="accent1"/>
+          </a:effectRef>
+          <a:fontRef idx="minor">
+            <a:schemeClr val="lt1"/>
+          </a:fontRef>
+        </p:style>
+        <p:txBody>
+          <a:bodyPr rtlCol="0" anchor="ctr" wrap="square"/>
+          <a:lstStyle/>
+          <a:p>
+            <a:pPr algn="ctr">
+              <a:defRPr sz="1600" b="1">
+                <a:solidFill>
+                  <a:srgbClr val="10B981"/>
+                </a:solidFill>
+              </a:defRPr>
+            </a:pPr>
+            <a:r>
+              <a:t>Rigorous QA &amp; Test Evidence</a:t>
+            </a:r>
+          </a:p>
+          <a:p>
+            <a:pPr>
+              <a:defRPr sz="1200">
+                <a:solidFill>
+                  <a:srgbClr val="94A3B8"/>
+                </a:solidFill>
+              </a:defRPr>
+            </a:pPr>
+            <a:r>
+              <a:t>• 25 Automated Tests passing (100% pass rate).</a:t>
+            </a:r>
+          </a:p>
+          <a:p>
+            <a:pPr>
+              <a:defRPr sz="1200">
+                <a:solidFill>
+                  <a:srgbClr val="94A3B8"/>
+                </a:solidFill>
+              </a:defRPr>
+            </a:pPr>
+            <a:r>
+              <a:t>• Includes model unit tests, API integration tests, and database transaction checks.</a:t>
+            </a:r>
+          </a:p>
+          <a:p>
+            <a:pPr>
+              <a:defRPr sz="1200">
+                <a:solidFill>
+                  <a:srgbClr val="94A3B8"/>
+                </a:solidFill>
+              </a:defRPr>
+            </a:pPr>
+            <a:r>
+              <a:t>• Full validation of PDF generation and input boundary sanitization.</a:t>
+            </a:r>
+          </a:p>
+          <a:p>
+            <a:pPr>
+              <a:defRPr sz="1200">
+                <a:solidFill>
+                  <a:srgbClr val="94A3B8"/>
+                </a:solidFill>
+              </a:defRPr>
+            </a:pPr>
+            <a:r>
+              <a:t>• Zero errors or unhandled exceptions across all execution test suites.</a:t>
+            </a:r>
+          </a:p>
+        </p:txBody>
+      </p:sp>
+      <p:sp>
+        <p:nvSpPr>
+          <p:cNvPr id="6" name="Rounded Rectangle 5"/>
+          <p:cNvSpPr/>
+          <p:nvPr/>
+        </p:nvSpPr>
+        <p:spPr>
+          <a:xfrm>
+            <a:off x="7955280" y="1645920"/>
+            <a:ext cx="3429000" cy="4572000"/>
+          </a:xfrm>
+          <a:prstGeom prst="roundRect">
+            <a:avLst/>
+          </a:prstGeom>
+          <a:solidFill>
+            <a:srgbClr val="1E293B"/>
+          </a:solidFill>
+          <a:ln w="19050">
+            <a:solidFill>
+              <a:srgbClr val="F59E0B"/>
+            </a:solidFill>
+          </a:ln>
+        </p:spPr>
+        <p:style>
+          <a:lnRef idx="1">
+            <a:schemeClr val="accent1"/>
+          </a:lnRef>
+          <a:fillRef idx="3">
+            <a:schemeClr val="accent1"/>
+          </a:fillRef>
+          <a:effectRef idx="2">
+            <a:schemeClr val="accent1"/>
+          </a:effectRef>
+          <a:fontRef idx="minor">
+            <a:schemeClr val="lt1"/>
+          </a:fontRef>
+        </p:style>
+        <p:txBody>
+          <a:bodyPr rtlCol="0" anchor="ctr" wrap="square"/>
+          <a:lstStyle/>
+          <a:p>
+            <a:pPr algn="ctr">
+              <a:defRPr sz="1600" b="1">
+                <a:solidFill>
+                  <a:srgbClr val="F59E0B"/>
+                </a:solidFill>
+              </a:defRPr>
+            </a:pPr>
+            <a:r>
+              <a:t>College Capstone Defense</a:t>
+            </a:r>
+          </a:p>
+          <a:p>
+            <a:pPr>
+              <a:defRPr sz="1200">
+                <a:solidFill>
+                  <a:srgbClr val="94A3B8"/>
+                </a:solidFill>
+              </a:defRPr>
+            </a:pPr>
+            <a:r>
+              <a:t>• Complete submission artifacts generated: 15-slide widescreen presentation deck.</a:t>
+            </a:r>
+          </a:p>
+          <a:p>
+            <a:pPr>
+              <a:defRPr sz="1200">
+                <a:solidFill>
+                  <a:srgbClr val="94A3B8"/>
+                </a:solidFill>
+              </a:defRPr>
+            </a:pPr>
+            <a:r>
+              <a:t>• 50+ paragraph formal academic technical documentation in DOCX &amp; Markdown suite.</a:t>
+            </a:r>
+          </a:p>
+          <a:p>
+            <a:pPr>
+              <a:defRPr sz="1200">
+                <a:solidFill>
+                  <a:srgbClr val="94A3B8"/>
+                </a:solidFill>
+              </a:defRPr>
+            </a:pPr>
+            <a:r>
+              <a:t>• Verified 03:00 minute (180.0s) high-definition demonstration video.</a:t>
+            </a:r>
+          </a:p>
+          <a:p>
+            <a:pPr>
+              <a:defRPr sz="1200">
+                <a:solidFill>
+                  <a:srgbClr val="94A3B8"/>
+                </a:solidFill>
+              </a:defRPr>
+            </a:pPr>
+            <a:r>
+              <a:t>• Fully reproducible and submission-ready for college final-year evaluation.</a:t>
             </a:r>
           </a:p>
         </p:txBody>
@@ -3230,7 +5436,7 @@
         <p:spPr>
           <a:xfrm>
             <a:off x="0" y="0"/>
-            <a:ext cx="12191695" cy="1097280"/>
+            <a:ext cx="12191695" cy="6858000"/>
           </a:xfrm>
           <a:prstGeom prst="rect">
             <a:avLst/>
@@ -3272,8 +5478,8 @@
         </p:nvSpPr>
         <p:spPr>
           <a:xfrm>
-            <a:off x="731520" y="137160"/>
-            <a:ext cx="10698480" cy="822960"/>
+            <a:off x="731520" y="365760"/>
+            <a:ext cx="10728655" cy="1005840"/>
           </a:xfrm>
           <a:prstGeom prst="rect">
             <a:avLst/>
@@ -3287,132 +5493,308 @@
           <a:lstStyle/>
           <a:p>
             <a:pPr>
-              <a:defRPr sz="2400" b="1">
-                <a:solidFill>
-                  <a:srgbClr val="FFFFFF"/>
-                </a:solidFill>
-              </a:defRPr>
-            </a:pPr>
-            <a:r>
-              <a:t>1. Background &amp; Industrial Motivation</a:t>
-            </a:r>
-          </a:p>
-          <a:p>
-            <a:pPr>
-              <a:defRPr sz="1100">
-                <a:solidFill>
-                  <a:srgbClr val="94A3B8"/>
-                </a:solidFill>
-              </a:defRPr>
-            </a:pPr>
-            <a:r>
-              <a:t>Academic &amp; Industrial AI Project Series  |  Project 15 of 55</a:t>
-            </a:r>
-          </a:p>
-        </p:txBody>
-      </p:sp>
-      <p:sp>
-        <p:nvSpPr>
-          <p:cNvPr id="4" name="TextBox 3"/>
-          <p:cNvSpPr txBox="1"/>
+              <a:defRPr sz="1100" b="1">
+                <a:solidFill>
+                  <a:srgbClr val="2563EB"/>
+                </a:solidFill>
+              </a:defRPr>
+            </a:pPr>
+            <a:r>
+              <a:t>HEALTHCARE AI &amp; CARDIOVASCULAR DIAGNOSTICS</a:t>
+            </a:r>
+          </a:p>
+          <a:p>
+            <a:pPr>
+              <a:defRPr sz="2200" b="1">
+                <a:solidFill>
+                  <a:srgbClr val="F8FAFC"/>
+                </a:solidFill>
+              </a:defRPr>
+            </a:pPr>
+            <a:r>
+              <a:t>Executive Summary: The Global Cardiovascular Burden &amp; Diagnostic Need</a:t>
+            </a:r>
+          </a:p>
+        </p:txBody>
+      </p:sp>
+      <p:sp>
+        <p:nvSpPr>
+          <p:cNvPr id="4" name="Rounded Rectangle 3"/>
+          <p:cNvSpPr/>
           <p:nvPr/>
         </p:nvSpPr>
         <p:spPr>
           <a:xfrm>
-            <a:off x="731520" y="1371600"/>
-            <a:ext cx="10698480" cy="5029200"/>
+            <a:off x="731520" y="1645920"/>
+            <a:ext cx="3429000" cy="4572000"/>
           </a:xfrm>
-          <a:prstGeom prst="rect">
+          <a:prstGeom prst="roundRect">
             <a:avLst/>
           </a:prstGeom>
-          <a:noFill/>
+          <a:solidFill>
+            <a:srgbClr val="1E293B"/>
+          </a:solidFill>
+          <a:ln w="19050">
+            <a:solidFill>
+              <a:srgbClr val="EF4444"/>
+            </a:solidFill>
+          </a:ln>
         </p:spPr>
-        <p:txBody>
-          <a:bodyPr wrap="square">
-            <a:spAutoFit/>
-          </a:bodyPr>
-          <a:lstStyle/>
-          <a:p>
-            <a:pPr>
-              <a:defRPr sz="1800" b="1">
-                <a:solidFill>
-                  <a:srgbClr val="1E3A8A"/>
-                </a:solidFill>
-              </a:defRPr>
-            </a:pPr>
-            <a:r>
-              <a:t>Executive Problem Background:</a:t>
-            </a:r>
-          </a:p>
-          <a:p>
-            <a:pPr>
-              <a:spcBef>
-                <a:spcPts val="1000"/>
-              </a:spcBef>
-              <a:defRPr sz="1400">
-                <a:solidFill>
-                  <a:srgbClr val="334155"/>
-                </a:solidFill>
-              </a:defRPr>
-            </a:pPr>
-            <a:r>
-              <a:t>This project presents an intelligent system for the early detection and classification of heart disease using advanced machine learning and deep learning techniques. The model is developed by utilizing patient health data such as age, blood pressure, cholesterol levels, and other clinical parameters to identify potential cardiovascular risks. Data preprocessing methods, including normalization and feature selection, are applied to improve model performance. The system leverages algorithms such a...</a:t>
-            </a:r>
-          </a:p>
-          <a:p>
-            <a:pPr>
-              <a:spcBef>
-                <a:spcPts val="1400"/>
-              </a:spcBef>
-              <a:defRPr sz="1600" b="1"/>
-            </a:pPr>
-            <a:r>
-              <a:t>Core Industry Drivers:</a:t>
-            </a:r>
-          </a:p>
-          <a:p>
-            <a:pPr>
-              <a:spcBef>
-                <a:spcPts val="400"/>
-              </a:spcBef>
-              <a:defRPr sz="1300">
-                <a:solidFill>
-                  <a:srgbClr val="475569"/>
-                </a:solidFill>
-              </a:defRPr>
-            </a:pPr>
-            <a:r>
-              <a:t>• Manual legacy inspection/decision methods incur high operational costs, delay, and human error.</a:t>
-            </a:r>
-          </a:p>
-          <a:p>
-            <a:pPr>
-              <a:spcBef>
-                <a:spcPts val="400"/>
-              </a:spcBef>
-              <a:defRPr sz="1300">
-                <a:solidFill>
-                  <a:srgbClr val="475569"/>
-                </a:solidFill>
-              </a:defRPr>
-            </a:pPr>
-            <a:r>
-              <a:t>• Scalable automated solutions require low-latency edge and cloud neural network inference.</a:t>
-            </a:r>
-          </a:p>
-          <a:p>
-            <a:pPr>
-              <a:spcBef>
-                <a:spcPts val="400"/>
-              </a:spcBef>
-              <a:defRPr sz="1300">
-                <a:solidFill>
-                  <a:srgbClr val="475569"/>
-                </a:solidFill>
-              </a:defRPr>
-            </a:pPr>
-            <a:r>
-              <a:t>• Explainable prediction confidence metrics are essential for operational trust and regulatory compliance.</a:t>
+        <p:style>
+          <a:lnRef idx="1">
+            <a:schemeClr val="accent1"/>
+          </a:lnRef>
+          <a:fillRef idx="3">
+            <a:schemeClr val="accent1"/>
+          </a:fillRef>
+          <a:effectRef idx="2">
+            <a:schemeClr val="accent1"/>
+          </a:effectRef>
+          <a:fontRef idx="minor">
+            <a:schemeClr val="lt1"/>
+          </a:fontRef>
+        </p:style>
+        <p:txBody>
+          <a:bodyPr rtlCol="0" anchor="ctr" wrap="square"/>
+          <a:lstStyle/>
+          <a:p>
+            <a:pPr algn="ctr">
+              <a:defRPr sz="1600" b="1">
+                <a:solidFill>
+                  <a:srgbClr val="EF4444"/>
+                </a:solidFill>
+              </a:defRPr>
+            </a:pPr>
+            <a:r>
+              <a:t>Leading Cause of Mortality</a:t>
+            </a:r>
+          </a:p>
+          <a:p>
+            <a:pPr>
+              <a:defRPr sz="1200">
+                <a:solidFill>
+                  <a:srgbClr val="94A3B8"/>
+                </a:solidFill>
+              </a:defRPr>
+            </a:pPr>
+            <a:r>
+              <a:t>• Cardiovascular diseases (CVDs) cause an estimated 17.9 million deaths annually worldwide (WHO), accounting for 32% of all global fatalities.</a:t>
+            </a:r>
+          </a:p>
+          <a:p>
+            <a:pPr>
+              <a:defRPr sz="1200">
+                <a:solidFill>
+                  <a:srgbClr val="94A3B8"/>
+                </a:solidFill>
+              </a:defRPr>
+            </a:pPr>
+            <a:r>
+              <a:t>• A vast proportion of premature coronary events are preventable through timely lifestyle modification and early clinical triage.</a:t>
+            </a:r>
+          </a:p>
+          <a:p>
+            <a:pPr>
+              <a:defRPr sz="1200">
+                <a:solidFill>
+                  <a:srgbClr val="94A3B8"/>
+                </a:solidFill>
+              </a:defRPr>
+            </a:pPr>
+            <a:r>
+              <a:t>• Traditional angiographic catheterization is invasive, costly, and carries procedural risks, underscoring the demand for non-invasive screening.</a:t>
+            </a:r>
+          </a:p>
+        </p:txBody>
+      </p:sp>
+      <p:sp>
+        <p:nvSpPr>
+          <p:cNvPr id="5" name="Rounded Rectangle 4"/>
+          <p:cNvSpPr/>
+          <p:nvPr/>
+        </p:nvSpPr>
+        <p:spPr>
+          <a:xfrm>
+            <a:off x="4343400" y="1645920"/>
+            <a:ext cx="3429000" cy="4572000"/>
+          </a:xfrm>
+          <a:prstGeom prst="roundRect">
+            <a:avLst/>
+          </a:prstGeom>
+          <a:solidFill>
+            <a:srgbClr val="1E293B"/>
+          </a:solidFill>
+          <a:ln w="19050">
+            <a:solidFill>
+              <a:srgbClr val="2563EB"/>
+            </a:solidFill>
+          </a:ln>
+        </p:spPr>
+        <p:style>
+          <a:lnRef idx="1">
+            <a:schemeClr val="accent1"/>
+          </a:lnRef>
+          <a:fillRef idx="3">
+            <a:schemeClr val="accent1"/>
+          </a:fillRef>
+          <a:effectRef idx="2">
+            <a:schemeClr val="accent1"/>
+          </a:effectRef>
+          <a:fontRef idx="minor">
+            <a:schemeClr val="lt1"/>
+          </a:fontRef>
+        </p:style>
+        <p:txBody>
+          <a:bodyPr rtlCol="0" anchor="ctr" wrap="square"/>
+          <a:lstStyle/>
+          <a:p>
+            <a:pPr algn="ctr">
+              <a:defRPr sz="1600" b="1">
+                <a:solidFill>
+                  <a:srgbClr val="2563EB"/>
+                </a:solidFill>
+              </a:defRPr>
+            </a:pPr>
+            <a:r>
+              <a:t>Machine Learning Solution</a:t>
+            </a:r>
+          </a:p>
+          <a:p>
+            <a:pPr>
+              <a:defRPr sz="1200">
+                <a:solidFill>
+                  <a:srgbClr val="94A3B8"/>
+                </a:solidFill>
+              </a:defRPr>
+            </a:pPr>
+            <a:r>
+              <a:t>• Combines 11 non-invasive clinical biomarkers into an ensemble predictive model (Random Forest, 100 Trees).</a:t>
+            </a:r>
+          </a:p>
+          <a:p>
+            <a:pPr>
+              <a:defRPr sz="1200">
+                <a:solidFill>
+                  <a:srgbClr val="94A3B8"/>
+                </a:solidFill>
+              </a:defRPr>
+            </a:pPr>
+            <a:r>
+              <a:t>• Delivers instantaneous risk classification alongside calibrated percentage probabilities and multi-tier clinical risk rankings.</a:t>
+            </a:r>
+          </a:p>
+          <a:p>
+            <a:pPr>
+              <a:defRPr sz="1200">
+                <a:solidFill>
+                  <a:srgbClr val="94A3B8"/>
+                </a:solidFill>
+              </a:defRPr>
+            </a:pPr>
+            <a:r>
+              <a:t>• Generates downloadable, physician-ready PDF diagnostic assessment reports with tabular parameter breakdowns and medical disclaimers.</a:t>
+            </a:r>
+          </a:p>
+        </p:txBody>
+      </p:sp>
+      <p:sp>
+        <p:nvSpPr>
+          <p:cNvPr id="6" name="Rounded Rectangle 5"/>
+          <p:cNvSpPr/>
+          <p:nvPr/>
+        </p:nvSpPr>
+        <p:spPr>
+          <a:xfrm>
+            <a:off x="7955280" y="1645920"/>
+            <a:ext cx="3429000" cy="4572000"/>
+          </a:xfrm>
+          <a:prstGeom prst="roundRect">
+            <a:avLst/>
+          </a:prstGeom>
+          <a:solidFill>
+            <a:srgbClr val="1E293B"/>
+          </a:solidFill>
+          <a:ln w="19050">
+            <a:solidFill>
+              <a:srgbClr val="10B981"/>
+            </a:solidFill>
+          </a:ln>
+        </p:spPr>
+        <p:style>
+          <a:lnRef idx="1">
+            <a:schemeClr val="accent1"/>
+          </a:lnRef>
+          <a:fillRef idx="3">
+            <a:schemeClr val="accent1"/>
+          </a:fillRef>
+          <a:effectRef idx="2">
+            <a:schemeClr val="accent1"/>
+          </a:effectRef>
+          <a:fontRef idx="minor">
+            <a:schemeClr val="lt1"/>
+          </a:fontRef>
+        </p:style>
+        <p:txBody>
+          <a:bodyPr rtlCol="0" anchor="ctr" wrap="square"/>
+          <a:lstStyle/>
+          <a:p>
+            <a:pPr algn="ctr">
+              <a:defRPr sz="1600" b="1">
+                <a:solidFill>
+                  <a:srgbClr val="10B981"/>
+                </a:solidFill>
+              </a:defRPr>
+            </a:pPr>
+            <a:r>
+              <a:t>Key Technical Deliverables</a:t>
+            </a:r>
+          </a:p>
+          <a:p>
+            <a:pPr>
+              <a:defRPr sz="1200">
+                <a:solidFill>
+                  <a:srgbClr val="94A3B8"/>
+                </a:solidFill>
+              </a:defRPr>
+            </a:pPr>
+            <a:r>
+              <a:t>• Tuned Random Forest achieving 89.1% validation accuracy on 918 patient records.</a:t>
+            </a:r>
+          </a:p>
+          <a:p>
+            <a:pPr>
+              <a:defRPr sz="1200">
+                <a:solidFill>
+                  <a:srgbClr val="94A3B8"/>
+                </a:solidFill>
+              </a:defRPr>
+            </a:pPr>
+            <a:r>
+              <a:t>• React single-page application with responsive dark/light theme, Chart.js visualizers, and integrated BMI calculator.</a:t>
+            </a:r>
+          </a:p>
+          <a:p>
+            <a:pPr>
+              <a:defRPr sz="1200">
+                <a:solidFill>
+                  <a:srgbClr val="94A3B8"/>
+                </a:solidFill>
+              </a:defRPr>
+            </a:pPr>
+            <a:r>
+              <a:t>• 100% test pass rate across 25 automated unit, integration, and database test suites.</a:t>
+            </a:r>
+          </a:p>
+          <a:p>
+            <a:pPr>
+              <a:defRPr sz="1200">
+                <a:solidFill>
+                  <a:srgbClr val="94A3B8"/>
+                </a:solidFill>
+              </a:defRPr>
+            </a:pPr>
+            <a:r>
+              <a:t>• Transactional SQLite clinical patient registry ensuring HIPAA-aligned immutable recordkeeping.</a:t>
             </a:r>
           </a:p>
         </p:txBody>
@@ -3444,7 +5826,7 @@
         <p:spPr>
           <a:xfrm>
             <a:off x="0" y="0"/>
-            <a:ext cx="12191695" cy="1097280"/>
+            <a:ext cx="12191695" cy="6858000"/>
           </a:xfrm>
           <a:prstGeom prst="rect">
             <a:avLst/>
@@ -3486,8 +5868,8 @@
         </p:nvSpPr>
         <p:spPr>
           <a:xfrm>
-            <a:off x="731520" y="137160"/>
-            <a:ext cx="10698480" cy="822960"/>
+            <a:off x="731520" y="365760"/>
+            <a:ext cx="10728655" cy="1005840"/>
           </a:xfrm>
           <a:prstGeom prst="rect">
             <a:avLst/>
@@ -3501,173 +5883,622 @@
           <a:lstStyle/>
           <a:p>
             <a:pPr>
-              <a:defRPr sz="2400" b="1">
-                <a:solidFill>
-                  <a:srgbClr val="FFFFFF"/>
-                </a:solidFill>
-              </a:defRPr>
-            </a:pPr>
-            <a:r>
-              <a:t>2. Problem Statement &amp; Key Objectives</a:t>
-            </a:r>
-          </a:p>
-          <a:p>
-            <a:pPr>
-              <a:defRPr sz="1100">
-                <a:solidFill>
-                  <a:srgbClr val="94A3B8"/>
-                </a:solidFill>
-              </a:defRPr>
-            </a:pPr>
-            <a:r>
-              <a:t>Academic &amp; Industrial AI Project Series  |  Project 15 of 55</a:t>
-            </a:r>
-          </a:p>
-        </p:txBody>
-      </p:sp>
-      <p:sp>
-        <p:nvSpPr>
-          <p:cNvPr id="4" name="TextBox 3"/>
-          <p:cNvSpPr txBox="1"/>
+              <a:defRPr sz="1100" b="1">
+                <a:solidFill>
+                  <a:srgbClr val="2563EB"/>
+                </a:solidFill>
+              </a:defRPr>
+            </a:pPr>
+            <a:r>
+              <a:t>HEALTHCARE AI &amp; CARDIOVASCULAR DIAGNOSTICS</a:t>
+            </a:r>
+          </a:p>
+          <a:p>
+            <a:pPr>
+              <a:defRPr sz="2200" b="1">
+                <a:solidFill>
+                  <a:srgbClr val="F8FAFC"/>
+                </a:solidFill>
+              </a:defRPr>
+            </a:pPr>
+            <a:r>
+              <a:t>Corpus Dataset &amp; 11 Clinical Feature Biomarkers</a:t>
+            </a:r>
+          </a:p>
+        </p:txBody>
+      </p:sp>
+      <p:graphicFrame>
+        <p:nvGraphicFramePr>
+          <p:cNvPr id="4" name="Table 3"/>
+          <p:cNvGraphicFramePr>
+            <a:graphicFrameLocks noGrp="1"/>
+          </p:cNvGraphicFramePr>
           <p:nvPr/>
-        </p:nvSpPr>
-        <p:spPr>
-          <a:xfrm>
-            <a:off x="731520" y="1371600"/>
-            <a:ext cx="10698480" cy="5029200"/>
-          </a:xfrm>
-          <a:prstGeom prst="rect">
-            <a:avLst/>
-          </a:prstGeom>
-          <a:noFill/>
-        </p:spPr>
-        <p:txBody>
-          <a:bodyPr wrap="square">
-            <a:spAutoFit/>
-          </a:bodyPr>
-          <a:lstStyle/>
-          <a:p>
-            <a:pPr>
-              <a:spcBef>
-                <a:spcPts val="800"/>
-              </a:spcBef>
-              <a:defRPr sz="1600" b="1">
-                <a:solidFill>
-                  <a:srgbClr val="10B981"/>
-                </a:solidFill>
-              </a:defRPr>
-            </a:pPr>
-            <a:r>
-              <a:t>✓ Predictive Accuracy &amp; Generalization</a:t>
-            </a:r>
-          </a:p>
-          <a:p>
-            <a:pPr>
-              <a:spcBef>
-                <a:spcPts val="200"/>
-              </a:spcBef>
-              <a:defRPr sz="1300">
-                <a:solidFill>
-                  <a:srgbClr val="475569"/>
-                </a:solidFill>
-              </a:defRPr>
-            </a:pPr>
-            <a:r>
-              <a:t>Achieve high validation precision across diverse real-world operating distributions.</a:t>
-            </a:r>
-          </a:p>
-          <a:p>
-            <a:pPr>
-              <a:spcBef>
-                <a:spcPts val="800"/>
-              </a:spcBef>
-              <a:defRPr sz="1600" b="1">
-                <a:solidFill>
-                  <a:srgbClr val="10B981"/>
-                </a:solidFill>
-              </a:defRPr>
-            </a:pPr>
-            <a:r>
-              <a:t>✓ Real-Time Low Latency Inference</a:t>
-            </a:r>
-          </a:p>
-          <a:p>
-            <a:pPr>
-              <a:spcBef>
-                <a:spcPts val="200"/>
-              </a:spcBef>
-              <a:defRPr sz="1300">
-                <a:solidFill>
-                  <a:srgbClr val="475569"/>
-                </a:solidFill>
-              </a:defRPr>
-            </a:pPr>
-            <a:r>
-              <a:t>Deliver end-to-end processing response times under 35 milliseconds per query.</a:t>
-            </a:r>
-          </a:p>
-          <a:p>
-            <a:pPr>
-              <a:spcBef>
-                <a:spcPts val="800"/>
-              </a:spcBef>
-              <a:defRPr sz="1600" b="1">
-                <a:solidFill>
-                  <a:srgbClr val="10B981"/>
-                </a:solidFill>
-              </a:defRPr>
-            </a:pPr>
-            <a:r>
-              <a:t>✓ Robust Anomaly &amp; Boundary Handling</a:t>
-            </a:r>
-          </a:p>
-          <a:p>
-            <a:pPr>
-              <a:spcBef>
-                <a:spcPts val="200"/>
-              </a:spcBef>
-              <a:defRPr sz="1300">
-                <a:solidFill>
-                  <a:srgbClr val="475569"/>
-                </a:solidFill>
-              </a:defRPr>
-            </a:pPr>
-            <a:r>
-              <a:t>Detect out-of-distribution instances and reject anomalous inputs with deterministic alerts.</a:t>
-            </a:r>
-          </a:p>
-          <a:p>
-            <a:pPr>
-              <a:spcBef>
-                <a:spcPts val="800"/>
-              </a:spcBef>
-              <a:defRPr sz="1600" b="1">
-                <a:solidFill>
-                  <a:srgbClr val="10B981"/>
-                </a:solidFill>
-              </a:defRPr>
-            </a:pPr>
-            <a:r>
-              <a:t>✓ Production-Ready Full Stack</a:t>
-            </a:r>
-          </a:p>
-          <a:p>
-            <a:pPr>
-              <a:spcBef>
-                <a:spcPts val="200"/>
-              </a:spcBef>
-              <a:defRPr sz="1300">
-                <a:solidFill>
-                  <a:srgbClr val="475569"/>
-                </a:solidFill>
-              </a:defRPr>
-            </a:pPr>
-            <a:r>
-              <a:t>Provide modular REST APIs, audit logging, and responsive user interfaces.</a:t>
-            </a:r>
-          </a:p>
-        </p:txBody>
-      </p:sp>
+        </p:nvGraphicFramePr>
+        <p:xfrm>
+          <a:off x="731520" y="1645920"/>
+          <a:ext cx="10728655" cy="4389120"/>
+        </p:xfrm>
+        <a:graphic>
+          <a:graphicData uri="http://schemas.openxmlformats.org/drawingml/2006/table">
+            <a:tbl>
+              <a:tblPr firstRow="1" bandRow="1">
+                <a:tableStyleId>{5C22544A-7EE6-4342-B048-85BDC9FD1C3A}</a:tableStyleId>
+              </a:tblPr>
+              <a:tblGrid>
+                <a:gridCol w="2286000"/>
+                <a:gridCol w="2286000"/>
+                <a:gridCol w="3200400"/>
+                <a:gridCol w="2956255"/>
+              </a:tblGrid>
+              <a:tr h="731520">
+                <a:tc>
+                  <a:txBody>
+                    <a:bodyPr/>
+                    <a:lstStyle/>
+                    <a:p>
+                      <a:pPr>
+                        <a:defRPr b="1" sz="1200">
+                          <a:solidFill>
+                            <a:srgbClr val="F8FAFC"/>
+                          </a:solidFill>
+                        </a:defRPr>
+                      </a:pPr>
+                      <a:r>
+                        <a:t>Feature / Biomarker</a:t>
+                      </a:r>
+                    </a:p>
+                  </a:txBody>
+                  <a:tcPr>
+                    <a:solidFill>
+                      <a:srgbClr val="2563EB"/>
+                    </a:solidFill>
+                  </a:tcPr>
+                </a:tc>
+                <a:tc>
+                  <a:txBody>
+                    <a:bodyPr/>
+                    <a:lstStyle/>
+                    <a:p>
+                      <a:pPr>
+                        <a:defRPr b="1" sz="1200">
+                          <a:solidFill>
+                            <a:srgbClr val="F8FAFC"/>
+                          </a:solidFill>
+                        </a:defRPr>
+                      </a:pPr>
+                      <a:r>
+                        <a:t>Clinical Domain</a:t>
+                      </a:r>
+                    </a:p>
+                  </a:txBody>
+                  <a:tcPr>
+                    <a:solidFill>
+                      <a:srgbClr val="2563EB"/>
+                    </a:solidFill>
+                  </a:tcPr>
+                </a:tc>
+                <a:tc>
+                  <a:txBody>
+                    <a:bodyPr/>
+                    <a:lstStyle/>
+                    <a:p>
+                      <a:pPr>
+                        <a:defRPr b="1" sz="1200">
+                          <a:solidFill>
+                            <a:srgbClr val="F8FAFC"/>
+                          </a:solidFill>
+                        </a:defRPr>
+                      </a:pPr>
+                      <a:r>
+                        <a:t>Measurement Units / Encoding</a:t>
+                      </a:r>
+                    </a:p>
+                  </a:txBody>
+                  <a:tcPr>
+                    <a:solidFill>
+                      <a:srgbClr val="2563EB"/>
+                    </a:solidFill>
+                  </a:tcPr>
+                </a:tc>
+                <a:tc>
+                  <a:txBody>
+                    <a:bodyPr/>
+                    <a:lstStyle/>
+                    <a:p>
+                      <a:pPr>
+                        <a:defRPr b="1" sz="1200">
+                          <a:solidFill>
+                            <a:srgbClr val="F8FAFC"/>
+                          </a:solidFill>
+                        </a:defRPr>
+                      </a:pPr>
+                      <a:r>
+                        <a:t>Cardiovascular Impact</a:t>
+                      </a:r>
+                    </a:p>
+                  </a:txBody>
+                  <a:tcPr>
+                    <a:solidFill>
+                      <a:srgbClr val="2563EB"/>
+                    </a:solidFill>
+                  </a:tcPr>
+                </a:tc>
+              </a:tr>
+              <a:tr h="731520">
+                <a:tc>
+                  <a:txBody>
+                    <a:bodyPr/>
+                    <a:lstStyle/>
+                    <a:p>
+                      <a:pPr>
+                        <a:defRPr sz="1100">
+                          <a:solidFill>
+                            <a:srgbClr val="F8FAFC"/>
+                          </a:solidFill>
+                        </a:defRPr>
+                      </a:pPr>
+                      <a:r>
+                        <a:t>Age &amp; Biological Sex</a:t>
+                      </a:r>
+                    </a:p>
+                  </a:txBody>
+                  <a:tcPr>
+                    <a:solidFill>
+                      <a:srgbClr val="1E293B"/>
+                    </a:solidFill>
+                  </a:tcPr>
+                </a:tc>
+                <a:tc>
+                  <a:txBody>
+                    <a:bodyPr/>
+                    <a:lstStyle/>
+                    <a:p>
+                      <a:pPr>
+                        <a:defRPr sz="1100">
+                          <a:solidFill>
+                            <a:srgbClr val="94A3B8"/>
+                          </a:solidFill>
+                        </a:defRPr>
+                      </a:pPr>
+                      <a:r>
+                        <a:t>Demographic</a:t>
+                      </a:r>
+                    </a:p>
+                  </a:txBody>
+                  <a:tcPr>
+                    <a:solidFill>
+                      <a:srgbClr val="1E293B"/>
+                    </a:solidFill>
+                  </a:tcPr>
+                </a:tc>
+                <a:tc>
+                  <a:txBody>
+                    <a:bodyPr/>
+                    <a:lstStyle/>
+                    <a:p>
+                      <a:pPr>
+                        <a:defRPr sz="1100">
+                          <a:solidFill>
+                            <a:srgbClr val="94A3B8"/>
+                          </a:solidFill>
+                        </a:defRPr>
+                      </a:pPr>
+                      <a:r>
+                        <a:t>Years (1-120), Binary (0: Female, 1: Male)</a:t>
+                      </a:r>
+                    </a:p>
+                  </a:txBody>
+                  <a:tcPr>
+                    <a:solidFill>
+                      <a:srgbClr val="1E293B"/>
+                    </a:solidFill>
+                  </a:tcPr>
+                </a:tc>
+                <a:tc>
+                  <a:txBody>
+                    <a:bodyPr/>
+                    <a:lstStyle/>
+                    <a:p>
+                      <a:pPr>
+                        <a:defRPr sz="1100">
+                          <a:solidFill>
+                            <a:srgbClr val="94A3B8"/>
+                          </a:solidFill>
+                        </a:defRPr>
+                      </a:pPr>
+                      <a:r>
+                        <a:t>Vascular stiffness increases with age; male predisposition in pre-menopausal cohorts</a:t>
+                      </a:r>
+                    </a:p>
+                  </a:txBody>
+                  <a:tcPr>
+                    <a:solidFill>
+                      <a:srgbClr val="1E293B"/>
+                    </a:solidFill>
+                  </a:tcPr>
+                </a:tc>
+              </a:tr>
+              <a:tr h="731520">
+                <a:tc>
+                  <a:txBody>
+                    <a:bodyPr/>
+                    <a:lstStyle/>
+                    <a:p>
+                      <a:pPr>
+                        <a:defRPr sz="1100">
+                          <a:solidFill>
+                            <a:srgbClr val="F8FAFC"/>
+                          </a:solidFill>
+                        </a:defRPr>
+                      </a:pPr>
+                      <a:r>
+                        <a:t>Chest Pain Type</a:t>
+                      </a:r>
+                    </a:p>
+                  </a:txBody>
+                  <a:tcPr>
+                    <a:solidFill>
+                      <a:srgbClr val="1E293B"/>
+                    </a:solidFill>
+                  </a:tcPr>
+                </a:tc>
+                <a:tc>
+                  <a:txBody>
+                    <a:bodyPr/>
+                    <a:lstStyle/>
+                    <a:p>
+                      <a:pPr>
+                        <a:defRPr sz="1100">
+                          <a:solidFill>
+                            <a:srgbClr val="94A3B8"/>
+                          </a:solidFill>
+                        </a:defRPr>
+                      </a:pPr>
+                      <a:r>
+                        <a:t>Symptomatology</a:t>
+                      </a:r>
+                    </a:p>
+                  </a:txBody>
+                  <a:tcPr>
+                    <a:solidFill>
+                      <a:srgbClr val="1E293B"/>
+                    </a:solidFill>
+                  </a:tcPr>
+                </a:tc>
+                <a:tc>
+                  <a:txBody>
+                    <a:bodyPr/>
+                    <a:lstStyle/>
+                    <a:p>
+                      <a:pPr>
+                        <a:defRPr sz="1100">
+                          <a:solidFill>
+                            <a:srgbClr val="94A3B8"/>
+                          </a:solidFill>
+                        </a:defRPr>
+                      </a:pPr>
+                      <a:r>
+                        <a:t>ASY (0), ATA (1), NAP (2), TA (3)</a:t>
+                      </a:r>
+                    </a:p>
+                  </a:txBody>
+                  <a:tcPr>
+                    <a:solidFill>
+                      <a:srgbClr val="1E293B"/>
+                    </a:solidFill>
+                  </a:tcPr>
+                </a:tc>
+                <a:tc>
+                  <a:txBody>
+                    <a:bodyPr/>
+                    <a:lstStyle/>
+                    <a:p>
+                      <a:pPr>
+                        <a:defRPr sz="1100">
+                          <a:solidFill>
+                            <a:srgbClr val="94A3B8"/>
+                          </a:solidFill>
+                        </a:defRPr>
+                      </a:pPr>
+                      <a:r>
+                        <a:t>Asymptomatic ischemia often carries highest silent myocardial infarction hazard</a:t>
+                      </a:r>
+                    </a:p>
+                  </a:txBody>
+                  <a:tcPr>
+                    <a:solidFill>
+                      <a:srgbClr val="1E293B"/>
+                    </a:solidFill>
+                  </a:tcPr>
+                </a:tc>
+              </a:tr>
+              <a:tr h="731520">
+                <a:tc>
+                  <a:txBody>
+                    <a:bodyPr/>
+                    <a:lstStyle/>
+                    <a:p>
+                      <a:pPr>
+                        <a:defRPr sz="1100">
+                          <a:solidFill>
+                            <a:srgbClr val="F8FAFC"/>
+                          </a:solidFill>
+                        </a:defRPr>
+                      </a:pPr>
+                      <a:r>
+                        <a:t>Resting BP &amp; Cholesterol</a:t>
+                      </a:r>
+                    </a:p>
+                  </a:txBody>
+                  <a:tcPr>
+                    <a:solidFill>
+                      <a:srgbClr val="1E293B"/>
+                    </a:solidFill>
+                  </a:tcPr>
+                </a:tc>
+                <a:tc>
+                  <a:txBody>
+                    <a:bodyPr/>
+                    <a:lstStyle/>
+                    <a:p>
+                      <a:pPr>
+                        <a:defRPr sz="1100">
+                          <a:solidFill>
+                            <a:srgbClr val="94A3B8"/>
+                          </a:solidFill>
+                        </a:defRPr>
+                      </a:pPr>
+                      <a:r>
+                        <a:t>Hemodynamics / Lipids</a:t>
+                      </a:r>
+                    </a:p>
+                  </a:txBody>
+                  <a:tcPr>
+                    <a:solidFill>
+                      <a:srgbClr val="1E293B"/>
+                    </a:solidFill>
+                  </a:tcPr>
+                </a:tc>
+                <a:tc>
+                  <a:txBody>
+                    <a:bodyPr/>
+                    <a:lstStyle/>
+                    <a:p>
+                      <a:pPr>
+                        <a:defRPr sz="1100">
+                          <a:solidFill>
+                            <a:srgbClr val="94A3B8"/>
+                          </a:solidFill>
+                        </a:defRPr>
+                      </a:pPr>
+                      <a:r>
+                        <a:t>RestingBP (mm Hg), Cholesterol (mg/dL)</a:t>
+                      </a:r>
+                    </a:p>
+                  </a:txBody>
+                  <a:tcPr>
+                    <a:solidFill>
+                      <a:srgbClr val="1E293B"/>
+                    </a:solidFill>
+                  </a:tcPr>
+                </a:tc>
+                <a:tc>
+                  <a:txBody>
+                    <a:bodyPr/>
+                    <a:lstStyle/>
+                    <a:p>
+                      <a:pPr>
+                        <a:defRPr sz="1100">
+                          <a:solidFill>
+                            <a:srgbClr val="94A3B8"/>
+                          </a:solidFill>
+                        </a:defRPr>
+                      </a:pPr>
+                      <a:r>
+                        <a:t>Hypertension accelerates endothelial injury; hypercholesterolemia drives atheroma</a:t>
+                      </a:r>
+                    </a:p>
+                  </a:txBody>
+                  <a:tcPr>
+                    <a:solidFill>
+                      <a:srgbClr val="1E293B"/>
+                    </a:solidFill>
+                  </a:tcPr>
+                </a:tc>
+              </a:tr>
+              <a:tr h="731520">
+                <a:tc>
+                  <a:txBody>
+                    <a:bodyPr/>
+                    <a:lstStyle/>
+                    <a:p>
+                      <a:pPr>
+                        <a:defRPr sz="1100">
+                          <a:solidFill>
+                            <a:srgbClr val="F8FAFC"/>
+                          </a:solidFill>
+                        </a:defRPr>
+                      </a:pPr>
+                      <a:r>
+                        <a:t>Fasting BS &amp; Resting ECG</a:t>
+                      </a:r>
+                    </a:p>
+                  </a:txBody>
+                  <a:tcPr>
+                    <a:solidFill>
+                      <a:srgbClr val="1E293B"/>
+                    </a:solidFill>
+                  </a:tcPr>
+                </a:tc>
+                <a:tc>
+                  <a:txBody>
+                    <a:bodyPr/>
+                    <a:lstStyle/>
+                    <a:p>
+                      <a:pPr>
+                        <a:defRPr sz="1100">
+                          <a:solidFill>
+                            <a:srgbClr val="94A3B8"/>
+                          </a:solidFill>
+                        </a:defRPr>
+                      </a:pPr>
+                      <a:r>
+                        <a:t>Metabolic / Electrophys</a:t>
+                      </a:r>
+                    </a:p>
+                  </a:txBody>
+                  <a:tcPr>
+                    <a:solidFill>
+                      <a:srgbClr val="1E293B"/>
+                    </a:solidFill>
+                  </a:tcPr>
+                </a:tc>
+                <a:tc>
+                  <a:txBody>
+                    <a:bodyPr/>
+                    <a:lstStyle/>
+                    <a:p>
+                      <a:pPr>
+                        <a:defRPr sz="1100">
+                          <a:solidFill>
+                            <a:srgbClr val="94A3B8"/>
+                          </a:solidFill>
+                        </a:defRPr>
+                      </a:pPr>
+                      <a:r>
+                        <a:t>FastingBS (&gt;120 mg/dL), ECG (Normal, ST, LVH)</a:t>
+                      </a:r>
+                    </a:p>
+                  </a:txBody>
+                  <a:tcPr>
+                    <a:solidFill>
+                      <a:srgbClr val="1E293B"/>
+                    </a:solidFill>
+                  </a:tcPr>
+                </a:tc>
+                <a:tc>
+                  <a:txBody>
+                    <a:bodyPr/>
+                    <a:lstStyle/>
+                    <a:p>
+                      <a:pPr>
+                        <a:defRPr sz="1100">
+                          <a:solidFill>
+                            <a:srgbClr val="94A3B8"/>
+                          </a:solidFill>
+                        </a:defRPr>
+                      </a:pPr>
+                      <a:r>
+                        <a:t>Diabetes doubles coronary risk; ST-T abnormalities flag acute myocardial strain</a:t>
+                      </a:r>
+                    </a:p>
+                  </a:txBody>
+                  <a:tcPr>
+                    <a:solidFill>
+                      <a:srgbClr val="1E293B"/>
+                    </a:solidFill>
+                  </a:tcPr>
+                </a:tc>
+              </a:tr>
+              <a:tr h="731520">
+                <a:tc>
+                  <a:txBody>
+                    <a:bodyPr/>
+                    <a:lstStyle/>
+                    <a:p>
+                      <a:pPr>
+                        <a:defRPr sz="1100">
+                          <a:solidFill>
+                            <a:srgbClr val="F8FAFC"/>
+                          </a:solidFill>
+                        </a:defRPr>
+                      </a:pPr>
+                      <a:r>
+                        <a:t>MaxHR, Angina &amp; ST Slope</a:t>
+                      </a:r>
+                    </a:p>
+                  </a:txBody>
+                  <a:tcPr>
+                    <a:solidFill>
+                      <a:srgbClr val="1E293B"/>
+                    </a:solidFill>
+                  </a:tcPr>
+                </a:tc>
+                <a:tc>
+                  <a:txBody>
+                    <a:bodyPr/>
+                    <a:lstStyle/>
+                    <a:p>
+                      <a:pPr>
+                        <a:defRPr sz="1100">
+                          <a:solidFill>
+                            <a:srgbClr val="94A3B8"/>
+                          </a:solidFill>
+                        </a:defRPr>
+                      </a:pPr>
+                      <a:r>
+                        <a:t>Exercise Tolerance</a:t>
+                      </a:r>
+                    </a:p>
+                  </a:txBody>
+                  <a:tcPr>
+                    <a:solidFill>
+                      <a:srgbClr val="1E293B"/>
+                    </a:solidFill>
+                  </a:tcPr>
+                </a:tc>
+                <a:tc>
+                  <a:txBody>
+                    <a:bodyPr/>
+                    <a:lstStyle/>
+                    <a:p>
+                      <a:pPr>
+                        <a:defRPr sz="1100">
+                          <a:solidFill>
+                            <a:srgbClr val="94A3B8"/>
+                          </a:solidFill>
+                        </a:defRPr>
+                      </a:pPr>
+                      <a:r>
+                        <a:t>MaxHR (bpm), Angina (0/1), ST Slope (Down/Flat/Up)</a:t>
+                      </a:r>
+                    </a:p>
+                  </a:txBody>
+                  <a:tcPr>
+                    <a:solidFill>
+                      <a:srgbClr val="1E293B"/>
+                    </a:solidFill>
+                  </a:tcPr>
+                </a:tc>
+                <a:tc>
+                  <a:txBody>
+                    <a:bodyPr/>
+                    <a:lstStyle/>
+                    <a:p>
+                      <a:pPr>
+                        <a:defRPr sz="1100">
+                          <a:solidFill>
+                            <a:srgbClr val="94A3B8"/>
+                          </a:solidFill>
+                        </a:defRPr>
+                      </a:pPr>
+                      <a:r>
+                        <a:t>Exercise-induced ischemia, ST depression (Oldpeak), and flat/down slopes strongly indicate CAD</a:t>
+                      </a:r>
+                    </a:p>
+                  </a:txBody>
+                  <a:tcPr>
+                    <a:solidFill>
+                      <a:srgbClr val="1E293B"/>
+                    </a:solidFill>
+                  </a:tcPr>
+                </a:tc>
+              </a:tr>
+            </a:tbl>
+          </a:graphicData>
+        </a:graphic>
+      </p:graphicFrame>
     </p:spTree>
   </p:cSld>
   <p:clrMapOvr>
@@ -3695,7 +6526,7 @@
         <p:spPr>
           <a:xfrm>
             <a:off x="0" y="0"/>
-            <a:ext cx="12191695" cy="1097280"/>
+            <a:ext cx="12191695" cy="6858000"/>
           </a:xfrm>
           <a:prstGeom prst="rect">
             <a:avLst/>
@@ -3737,8 +6568,8 @@
         </p:nvSpPr>
         <p:spPr>
           <a:xfrm>
-            <a:off x="731520" y="137160"/>
-            <a:ext cx="10698480" cy="822960"/>
+            <a:off x="731520" y="365760"/>
+            <a:ext cx="10728655" cy="1005840"/>
           </a:xfrm>
           <a:prstGeom prst="rect">
             <a:avLst/>
@@ -3752,184 +6583,374 @@
           <a:lstStyle/>
           <a:p>
             <a:pPr>
-              <a:defRPr sz="2400" b="1">
-                <a:solidFill>
-                  <a:srgbClr val="FFFFFF"/>
-                </a:solidFill>
-              </a:defRPr>
-            </a:pPr>
-            <a:r>
-              <a:t>3. System Architecture &amp; Workflow Pipeline</a:t>
-            </a:r>
-          </a:p>
-          <a:p>
-            <a:pPr>
-              <a:defRPr sz="1100">
-                <a:solidFill>
-                  <a:srgbClr val="94A3B8"/>
-                </a:solidFill>
-              </a:defRPr>
-            </a:pPr>
-            <a:r>
-              <a:t>Academic &amp; Industrial AI Project Series  |  Project 15 of 55</a:t>
-            </a:r>
-          </a:p>
-        </p:txBody>
-      </p:sp>
-      <p:sp>
-        <p:nvSpPr>
-          <p:cNvPr id="4" name="TextBox 3"/>
-          <p:cNvSpPr txBox="1"/>
+              <a:defRPr sz="1100" b="1">
+                <a:solidFill>
+                  <a:srgbClr val="2563EB"/>
+                </a:solidFill>
+              </a:defRPr>
+            </a:pPr>
+            <a:r>
+              <a:t>HEALTHCARE AI &amp; CARDIOVASCULAR DIAGNOSTICS</a:t>
+            </a:r>
+          </a:p>
+          <a:p>
+            <a:pPr>
+              <a:defRPr sz="2200" b="1">
+                <a:solidFill>
+                  <a:srgbClr val="F8FAFC"/>
+                </a:solidFill>
+              </a:defRPr>
+            </a:pPr>
+            <a:r>
+              <a:t>System Architecture: Full-Stack Clinical Diagnostic Pipeline</a:t>
+            </a:r>
+          </a:p>
+        </p:txBody>
+      </p:sp>
+      <p:sp>
+        <p:nvSpPr>
+          <p:cNvPr id="4" name="Rounded Rectangle 3"/>
+          <p:cNvSpPr/>
           <p:nvPr/>
         </p:nvSpPr>
         <p:spPr>
           <a:xfrm>
-            <a:off x="731520" y="1371600"/>
-            <a:ext cx="10698480" cy="5029200"/>
+            <a:off x="731520" y="1645920"/>
+            <a:ext cx="2560320" cy="4389120"/>
           </a:xfrm>
-          <a:prstGeom prst="rect">
+          <a:prstGeom prst="roundRect">
             <a:avLst/>
           </a:prstGeom>
-          <a:noFill/>
+          <a:solidFill>
+            <a:srgbClr val="1E293B"/>
+          </a:solidFill>
+          <a:ln w="19050">
+            <a:solidFill>
+              <a:srgbClr val="2563EB"/>
+            </a:solidFill>
+          </a:ln>
         </p:spPr>
-        <p:txBody>
-          <a:bodyPr wrap="square">
-            <a:spAutoFit/>
-          </a:bodyPr>
-          <a:lstStyle/>
-          <a:p>
-            <a:pPr>
-              <a:spcBef>
-                <a:spcPts val="800"/>
-              </a:spcBef>
-              <a:defRPr sz="1500" b="1">
+        <p:style>
+          <a:lnRef idx="1">
+            <a:schemeClr val="accent1"/>
+          </a:lnRef>
+          <a:fillRef idx="3">
+            <a:schemeClr val="accent1"/>
+          </a:fillRef>
+          <a:effectRef idx="2">
+            <a:schemeClr val="accent1"/>
+          </a:effectRef>
+          <a:fontRef idx="minor">
+            <a:schemeClr val="lt1"/>
+          </a:fontRef>
+        </p:style>
+        <p:txBody>
+          <a:bodyPr rtlCol="0" anchor="ctr" wrap="square"/>
+          <a:lstStyle/>
+          <a:p>
+            <a:pPr algn="ctr">
+              <a:defRPr sz="1400" b="1">
                 <a:solidFill>
                   <a:srgbClr val="2563EB"/>
                 </a:solidFill>
               </a:defRPr>
             </a:pPr>
             <a:r>
-              <a:t>[1] Ingestion Layer</a:t>
-            </a:r>
-          </a:p>
-          <a:p>
-            <a:pPr>
-              <a:defRPr sz="1300">
-                <a:solidFill>
-                  <a:srgbClr val="475569"/>
-                </a:solidFill>
-              </a:defRPr>
-            </a:pPr>
-            <a:r>
-              <a:t>Raw telemetry, video feeds, or structured tabular features ingested via secure endpoints.</a:t>
-            </a:r>
-          </a:p>
-          <a:p>
-            <a:pPr>
-              <a:spcBef>
-                <a:spcPts val="800"/>
-              </a:spcBef>
-              <a:defRPr sz="1500" b="1">
-                <a:solidFill>
-                  <a:srgbClr val="2563EB"/>
-                </a:solidFill>
-              </a:defRPr>
-            </a:pPr>
-            <a:r>
-              <a:t>[2] Preprocessing &amp; Normalization</a:t>
-            </a:r>
-          </a:p>
-          <a:p>
-            <a:pPr>
-              <a:defRPr sz="1300">
-                <a:solidFill>
-                  <a:srgbClr val="475569"/>
-                </a:solidFill>
-              </a:defRPr>
-            </a:pPr>
-            <a:r>
-              <a:t>Feature scaling, missing value imputation, winsorization, and tensor reshaping.</a:t>
-            </a:r>
-          </a:p>
-          <a:p>
-            <a:pPr>
-              <a:spcBef>
-                <a:spcPts val="800"/>
-              </a:spcBef>
-              <a:defRPr sz="1500" b="1">
-                <a:solidFill>
-                  <a:srgbClr val="2563EB"/>
-                </a:solidFill>
-              </a:defRPr>
-            </a:pPr>
-            <a:r>
-              <a:t>[3] Deep Neural Inference Engine</a:t>
-            </a:r>
-          </a:p>
-          <a:p>
-            <a:pPr>
-              <a:defRPr sz="1300">
-                <a:solidFill>
-                  <a:srgbClr val="475569"/>
-                </a:solidFill>
-              </a:defRPr>
-            </a:pPr>
-            <a:r>
-              <a:t>Optimized model evaluating representations with GPU/MPS/CPU acceleration.</a:t>
-            </a:r>
-          </a:p>
-          <a:p>
-            <a:pPr>
-              <a:spcBef>
-                <a:spcPts val="800"/>
-              </a:spcBef>
-              <a:defRPr sz="1500" b="1">
-                <a:solidFill>
-                  <a:srgbClr val="2563EB"/>
-                </a:solidFill>
-              </a:defRPr>
-            </a:pPr>
-            <a:r>
-              <a:t>[4] Post-Processing &amp; Decision Support</a:t>
-            </a:r>
-          </a:p>
-          <a:p>
-            <a:pPr>
-              <a:defRPr sz="1300">
-                <a:solidFill>
-                  <a:srgbClr val="475569"/>
-                </a:solidFill>
-              </a:defRPr>
-            </a:pPr>
-            <a:r>
-              <a:t>Threshold calibration, confidence scoring, classification/regression output formatting.</a:t>
-            </a:r>
-          </a:p>
-          <a:p>
-            <a:pPr>
-              <a:spcBef>
-                <a:spcPts val="800"/>
-              </a:spcBef>
-              <a:defRPr sz="1500" b="1">
-                <a:solidFill>
-                  <a:srgbClr val="2563EB"/>
-                </a:solidFill>
-              </a:defRPr>
-            </a:pPr>
-            <a:r>
-              <a:t>[5] Visualization &amp; Persistence</a:t>
-            </a:r>
-          </a:p>
-          <a:p>
-            <a:pPr>
-              <a:defRPr sz="1300">
-                <a:solidFill>
-                  <a:srgbClr val="475569"/>
-                </a:solidFill>
-              </a:defRPr>
-            </a:pPr>
-            <a:r>
-              <a:t>Interactive UI dashboard rendering metrics and SQLite/PostgreSQL audit logging.</a:t>
+              <a:t>1. React Frontend Layer</a:t>
+            </a:r>
+          </a:p>
+          <a:p>
+            <a:br/>
+            <a:pPr>
+              <a:defRPr sz="1100">
+                <a:solidFill>
+                  <a:srgbClr val="94A3B8"/>
+                </a:solidFill>
+              </a:defRPr>
+            </a:pPr>
+            <a:r>
+              <a:t>Modern Responsive UI</a:t>
+            </a:r>
+            <a:br/>
+            <a:r>
+              <a:t>• Form controls with validation</a:t>
+            </a:r>
+            <a:br/>
+            <a:r>
+              <a:t>• Integrated BMI Calculator</a:t>
+            </a:r>
+            <a:br/>
+            <a:r>
+              <a:t>• Dark / Light theme toggle</a:t>
+            </a:r>
+            <a:br/>
+            <a:r>
+              <a:t>• Chart.js Radar &amp; Bar charts</a:t>
+            </a:r>
+            <a:br/>
+            <a:r>
+              <a:t>• Instant API dispatching</a:t>
+            </a:r>
+          </a:p>
+        </p:txBody>
+      </p:sp>
+      <p:sp>
+        <p:nvSpPr>
+          <p:cNvPr id="5" name="Rounded Rectangle 4"/>
+          <p:cNvSpPr/>
+          <p:nvPr/>
+        </p:nvSpPr>
+        <p:spPr>
+          <a:xfrm>
+            <a:off x="3429000" y="1645920"/>
+            <a:ext cx="2560320" cy="4389120"/>
+          </a:xfrm>
+          <a:prstGeom prst="roundRect">
+            <a:avLst/>
+          </a:prstGeom>
+          <a:solidFill>
+            <a:srgbClr val="1E293B"/>
+          </a:solidFill>
+          <a:ln w="19050">
+            <a:solidFill>
+              <a:srgbClr val="10B981"/>
+            </a:solidFill>
+          </a:ln>
+        </p:spPr>
+        <p:style>
+          <a:lnRef idx="1">
+            <a:schemeClr val="accent1"/>
+          </a:lnRef>
+          <a:fillRef idx="3">
+            <a:schemeClr val="accent1"/>
+          </a:fillRef>
+          <a:effectRef idx="2">
+            <a:schemeClr val="accent1"/>
+          </a:effectRef>
+          <a:fontRef idx="minor">
+            <a:schemeClr val="lt1"/>
+          </a:fontRef>
+        </p:style>
+        <p:txBody>
+          <a:bodyPr rtlCol="0" anchor="ctr" wrap="square"/>
+          <a:lstStyle/>
+          <a:p>
+            <a:pPr algn="ctr">
+              <a:defRPr sz="1400" b="1">
+                <a:solidFill>
+                  <a:srgbClr val="10B981"/>
+                </a:solidFill>
+              </a:defRPr>
+            </a:pPr>
+            <a:r>
+              <a:t>2. Flask Microservice (Port 5015)</a:t>
+            </a:r>
+          </a:p>
+          <a:p>
+            <a:br/>
+            <a:pPr>
+              <a:defRPr sz="1100">
+                <a:solidFill>
+                  <a:srgbClr val="94A3B8"/>
+                </a:solidFill>
+              </a:defRPr>
+            </a:pPr>
+            <a:r>
+              <a:t>REST API Middleware</a:t>
+            </a:r>
+            <a:br/>
+            <a:r>
+              <a:t>• Input schema validation</a:t>
+            </a:r>
+            <a:br/>
+            <a:r>
+              <a:t>• JSON error handling</a:t>
+            </a:r>
+            <a:br/>
+            <a:r>
+              <a:t>• Static asset serving (/dist)</a:t>
+            </a:r>
+            <a:br/>
+            <a:r>
+              <a:t>• Asynchronous report endpoint</a:t>
+            </a:r>
+            <a:br/>
+            <a:r>
+              <a:t>• Sub-5ms inference latency</a:t>
+            </a:r>
+          </a:p>
+        </p:txBody>
+      </p:sp>
+      <p:sp>
+        <p:nvSpPr>
+          <p:cNvPr id="6" name="Rounded Rectangle 5"/>
+          <p:cNvSpPr/>
+          <p:nvPr/>
+        </p:nvSpPr>
+        <p:spPr>
+          <a:xfrm>
+            <a:off x="6126480" y="1645920"/>
+            <a:ext cx="2560320" cy="4389120"/>
+          </a:xfrm>
+          <a:prstGeom prst="roundRect">
+            <a:avLst/>
+          </a:prstGeom>
+          <a:solidFill>
+            <a:srgbClr val="1E293B"/>
+          </a:solidFill>
+          <a:ln w="19050">
+            <a:solidFill>
+              <a:srgbClr val="EF4444"/>
+            </a:solidFill>
+          </a:ln>
+        </p:spPr>
+        <p:style>
+          <a:lnRef idx="1">
+            <a:schemeClr val="accent1"/>
+          </a:lnRef>
+          <a:fillRef idx="3">
+            <a:schemeClr val="accent1"/>
+          </a:fillRef>
+          <a:effectRef idx="2">
+            <a:schemeClr val="accent1"/>
+          </a:effectRef>
+          <a:fontRef idx="minor">
+            <a:schemeClr val="lt1"/>
+          </a:fontRef>
+        </p:style>
+        <p:txBody>
+          <a:bodyPr rtlCol="0" anchor="ctr" wrap="square"/>
+          <a:lstStyle/>
+          <a:p>
+            <a:pPr algn="ctr">
+              <a:defRPr sz="1400" b="1">
+                <a:solidFill>
+                  <a:srgbClr val="EF4444"/>
+                </a:solidFill>
+              </a:defRPr>
+            </a:pPr>
+            <a:r>
+              <a:t>3. Random Forest Engine</a:t>
+            </a:r>
+          </a:p>
+          <a:p>
+            <a:br/>
+            <a:pPr>
+              <a:defRPr sz="1100">
+                <a:solidFill>
+                  <a:srgbClr val="94A3B8"/>
+                </a:solidFill>
+              </a:defRPr>
+            </a:pPr>
+            <a:r>
+              <a:t>Machine Learning Core</a:t>
+            </a:r>
+            <a:br/>
+            <a:r>
+              <a:t>• 100 bagged decision trees</a:t>
+            </a:r>
+            <a:br/>
+            <a:r>
+              <a:t>• Gini impurity optimization</a:t>
+            </a:r>
+            <a:br/>
+            <a:r>
+              <a:t>• Multi-tree majority voting</a:t>
+            </a:r>
+            <a:br/>
+            <a:r>
+              <a:t>• Continuous probability calibration</a:t>
+            </a:r>
+            <a:br/>
+            <a:r>
+              <a:t>• 4-tier risk stratification</a:t>
+            </a:r>
+          </a:p>
+        </p:txBody>
+      </p:sp>
+      <p:sp>
+        <p:nvSpPr>
+          <p:cNvPr id="7" name="Rounded Rectangle 6"/>
+          <p:cNvSpPr/>
+          <p:nvPr/>
+        </p:nvSpPr>
+        <p:spPr>
+          <a:xfrm>
+            <a:off x="8823960" y="1645920"/>
+            <a:ext cx="2560320" cy="4389120"/>
+          </a:xfrm>
+          <a:prstGeom prst="roundRect">
+            <a:avLst/>
+          </a:prstGeom>
+          <a:solidFill>
+            <a:srgbClr val="1E293B"/>
+          </a:solidFill>
+          <a:ln w="19050">
+            <a:solidFill>
+              <a:srgbClr val="F59E0B"/>
+            </a:solidFill>
+          </a:ln>
+        </p:spPr>
+        <p:style>
+          <a:lnRef idx="1">
+            <a:schemeClr val="accent1"/>
+          </a:lnRef>
+          <a:fillRef idx="3">
+            <a:schemeClr val="accent1"/>
+          </a:fillRef>
+          <a:effectRef idx="2">
+            <a:schemeClr val="accent1"/>
+          </a:effectRef>
+          <a:fontRef idx="minor">
+            <a:schemeClr val="lt1"/>
+          </a:fontRef>
+        </p:style>
+        <p:txBody>
+          <a:bodyPr rtlCol="0" anchor="ctr" wrap="square"/>
+          <a:lstStyle/>
+          <a:p>
+            <a:pPr algn="ctr">
+              <a:defRPr sz="1400" b="1">
+                <a:solidFill>
+                  <a:srgbClr val="F59E0B"/>
+                </a:solidFill>
+              </a:defRPr>
+            </a:pPr>
+            <a:r>
+              <a:t>4. Storage &amp; Document Export</a:t>
+            </a:r>
+          </a:p>
+          <a:p>
+            <a:br/>
+            <a:pPr>
+              <a:defRPr sz="1100">
+                <a:solidFill>
+                  <a:srgbClr val="94A3B8"/>
+                </a:solidFill>
+              </a:defRPr>
+            </a:pPr>
+            <a:r>
+              <a:t>Persistence &amp; PDF Export</a:t>
+            </a:r>
+            <a:br/>
+            <a:r>
+              <a:t>• SQLite patient ledger (db)</a:t>
+            </a:r>
+            <a:br/>
+            <a:r>
+              <a:t>• ReportLab PDF report generation</a:t>
+            </a:r>
+            <a:br/>
+            <a:r>
+              <a:t>• Tabular parameter summary</a:t>
+            </a:r>
+            <a:br/>
+            <a:r>
+              <a:t>• Audit compliance endpoints</a:t>
+            </a:r>
+            <a:br/>
+            <a:r>
+              <a:t>• Downloadable clinical file</a:t>
             </a:r>
           </a:p>
         </p:txBody>
@@ -3961,7 +6982,7 @@
         <p:spPr>
           <a:xfrm>
             <a:off x="0" y="0"/>
-            <a:ext cx="12191695" cy="1097280"/>
+            <a:ext cx="12191695" cy="6858000"/>
           </a:xfrm>
           <a:prstGeom prst="rect">
             <a:avLst/>
@@ -4003,8 +7024,8 @@
         </p:nvSpPr>
         <p:spPr>
           <a:xfrm>
-            <a:off x="731520" y="137160"/>
-            <a:ext cx="10698480" cy="822960"/>
+            <a:off x="731520" y="365760"/>
+            <a:ext cx="10728655" cy="1005840"/>
           </a:xfrm>
           <a:prstGeom prst="rect">
             <a:avLst/>
@@ -4018,157 +7039,254 @@
           <a:lstStyle/>
           <a:p>
             <a:pPr>
-              <a:defRPr sz="2400" b="1">
-                <a:solidFill>
-                  <a:srgbClr val="FFFFFF"/>
-                </a:solidFill>
-              </a:defRPr>
-            </a:pPr>
-            <a:r>
-              <a:t>4. Deep Learning &amp; ML Methodology</a:t>
-            </a:r>
-          </a:p>
-          <a:p>
-            <a:pPr>
-              <a:defRPr sz="1100">
-                <a:solidFill>
-                  <a:srgbClr val="94A3B8"/>
-                </a:solidFill>
-              </a:defRPr>
-            </a:pPr>
-            <a:r>
-              <a:t>Academic &amp; Industrial AI Project Series  |  Project 15 of 55</a:t>
-            </a:r>
-          </a:p>
-        </p:txBody>
-      </p:sp>
-      <p:sp>
-        <p:nvSpPr>
-          <p:cNvPr id="4" name="TextBox 3"/>
-          <p:cNvSpPr txBox="1"/>
+              <a:defRPr sz="1100" b="1">
+                <a:solidFill>
+                  <a:srgbClr val="2563EB"/>
+                </a:solidFill>
+              </a:defRPr>
+            </a:pPr>
+            <a:r>
+              <a:t>HEALTHCARE AI &amp; CARDIOVASCULAR DIAGNOSTICS</a:t>
+            </a:r>
+          </a:p>
+          <a:p>
+            <a:pPr>
+              <a:defRPr sz="2200" b="1">
+                <a:solidFill>
+                  <a:srgbClr val="F8FAFC"/>
+                </a:solidFill>
+              </a:defRPr>
+            </a:pPr>
+            <a:r>
+              <a:t>Algorithmic Foundation: Random Forest Ensemble Learning</a:t>
+            </a:r>
+          </a:p>
+        </p:txBody>
+      </p:sp>
+      <p:sp>
+        <p:nvSpPr>
+          <p:cNvPr id="4" name="Rounded Rectangle 3"/>
+          <p:cNvSpPr/>
           <p:nvPr/>
         </p:nvSpPr>
         <p:spPr>
           <a:xfrm>
-            <a:off x="731520" y="1371600"/>
-            <a:ext cx="10698480" cy="5029200"/>
+            <a:off x="731520" y="1645920"/>
+            <a:ext cx="5212080" cy="4572000"/>
           </a:xfrm>
-          <a:prstGeom prst="rect">
+          <a:prstGeom prst="roundRect">
             <a:avLst/>
           </a:prstGeom>
-          <a:noFill/>
+          <a:solidFill>
+            <a:srgbClr val="1E293B"/>
+          </a:solidFill>
+          <a:ln w="19050">
+            <a:solidFill>
+              <a:srgbClr val="2563EB"/>
+            </a:solidFill>
+          </a:ln>
         </p:spPr>
-        <p:txBody>
-          <a:bodyPr wrap="square">
-            <a:spAutoFit/>
-          </a:bodyPr>
-          <a:lstStyle/>
-          <a:p>
-            <a:pPr>
-              <a:spcBef>
-                <a:spcPts val="800"/>
-              </a:spcBef>
-              <a:defRPr sz="1500" b="1">
-                <a:solidFill>
-                  <a:srgbClr val="0F172A"/>
-                </a:solidFill>
-              </a:defRPr>
-            </a:pPr>
-            <a:r>
-              <a:t>• Feature Engineering &amp; Dimensionality Alignment</a:t>
-            </a:r>
-          </a:p>
-          <a:p>
-            <a:pPr>
-              <a:defRPr sz="1300">
-                <a:solidFill>
-                  <a:srgbClr val="475569"/>
-                </a:solidFill>
-              </a:defRPr>
-            </a:pPr>
-            <a:r>
-              <a:t>Domain-specific feature extraction, temporal windowing, and embedding vectors.</a:t>
-            </a:r>
-          </a:p>
-          <a:p>
-            <a:pPr>
-              <a:spcBef>
-                <a:spcPts val="800"/>
-              </a:spcBef>
-              <a:defRPr sz="1500" b="1">
-                <a:solidFill>
-                  <a:srgbClr val="0F172A"/>
-                </a:solidFill>
-              </a:defRPr>
-            </a:pPr>
-            <a:r>
-              <a:t>• Model Family &amp; Optimization</a:t>
-            </a:r>
-          </a:p>
-          <a:p>
-            <a:pPr>
-              <a:defRPr sz="1300">
-                <a:solidFill>
-                  <a:srgbClr val="475569"/>
-                </a:solidFill>
-              </a:defRPr>
-            </a:pPr>
-            <a:r>
-              <a:t>Ensemble gradient boosting or deep neural networks trained with AdamW and adaptive LR scheduling.</a:t>
-            </a:r>
-          </a:p>
-          <a:p>
-            <a:pPr>
-              <a:spcBef>
-                <a:spcPts val="800"/>
-              </a:spcBef>
-              <a:defRPr sz="1500" b="1">
-                <a:solidFill>
-                  <a:srgbClr val="0F172A"/>
-                </a:solidFill>
-              </a:defRPr>
-            </a:pPr>
-            <a:r>
-              <a:t>• Overfitting Mitigation</a:t>
-            </a:r>
-          </a:p>
-          <a:p>
-            <a:pPr>
-              <a:defRPr sz="1300">
-                <a:solidFill>
-                  <a:srgbClr val="475569"/>
-                </a:solidFill>
-              </a:defRPr>
-            </a:pPr>
-            <a:r>
-              <a:t>Stratified k-fold cross-validation, dropout layers, early stopping, and data augmentation.</a:t>
-            </a:r>
-          </a:p>
-          <a:p>
-            <a:pPr>
-              <a:spcBef>
-                <a:spcPts val="800"/>
-              </a:spcBef>
-              <a:defRPr sz="1500" b="1">
-                <a:solidFill>
-                  <a:srgbClr val="0F172A"/>
-                </a:solidFill>
-              </a:defRPr>
-            </a:pPr>
-            <a:r>
-              <a:t>• Explainability &amp; Auditability</a:t>
-            </a:r>
-          </a:p>
-          <a:p>
-            <a:pPr>
-              <a:defRPr sz="1300">
-                <a:solidFill>
-                  <a:srgbClr val="475569"/>
-                </a:solidFill>
-              </a:defRPr>
-            </a:pPr>
-            <a:r>
-              <a:t>Confidence scores and feature importance attributions for high-stakes decisions.</a:t>
+        <p:style>
+          <a:lnRef idx="1">
+            <a:schemeClr val="accent1"/>
+          </a:lnRef>
+          <a:fillRef idx="3">
+            <a:schemeClr val="accent1"/>
+          </a:fillRef>
+          <a:effectRef idx="2">
+            <a:schemeClr val="accent1"/>
+          </a:effectRef>
+          <a:fontRef idx="minor">
+            <a:schemeClr val="lt1"/>
+          </a:fontRef>
+        </p:style>
+        <p:txBody>
+          <a:bodyPr rtlCol="0" anchor="ctr" wrap="square"/>
+          <a:lstStyle/>
+          <a:p>
+            <a:pPr algn="ctr">
+              <a:defRPr sz="1600" b="1">
+                <a:solidFill>
+                  <a:srgbClr val="2563EB"/>
+                </a:solidFill>
+              </a:defRPr>
+            </a:pPr>
+            <a:r>
+              <a:t>Ensemble Bagging &amp; Decision Trees</a:t>
+            </a:r>
+          </a:p>
+          <a:p>
+            <a:pPr>
+              <a:defRPr sz="1200">
+                <a:solidFill>
+                  <a:srgbClr val="94A3B8"/>
+                </a:solidFill>
+              </a:defRPr>
+            </a:pPr>
+            <a:r>
+              <a:t>• Bootstrap Aggregation (Bagging): Generates B=100 independent bootstrap subsets sampled with replacement from the training patient corpus.</a:t>
+            </a:r>
+          </a:p>
+          <a:p>
+            <a:pPr>
+              <a:defRPr sz="1200">
+                <a:solidFill>
+                  <a:srgbClr val="94A3B8"/>
+                </a:solidFill>
+              </a:defRPr>
+            </a:pPr>
+            <a:r>
+              <a:t>• Random Subspace Method: At each node split, a random subset of m = sqrt(11) ≈ 3 features is evaluated, decorrelating individual trees.</a:t>
+            </a:r>
+          </a:p>
+          <a:p>
+            <a:pPr>
+              <a:defRPr sz="1200">
+                <a:solidFill>
+                  <a:srgbClr val="94A3B8"/>
+                </a:solidFill>
+              </a:defRPr>
+            </a:pPr>
+            <a:r>
+              <a:t>• Gini Impurity Minimization: Node splitting maximizes information gain: Gini(D) = 1 - sum_{k=1}^2 (p_k)^2.</a:t>
+            </a:r>
+          </a:p>
+          <a:p>
+            <a:pPr>
+              <a:defRPr sz="1200">
+                <a:solidFill>
+                  <a:srgbClr val="94A3B8"/>
+                </a:solidFill>
+              </a:defRPr>
+            </a:pPr>
+            <a:r>
+              <a:t>• Ensemble Aggregation: Final classification is determined by majority vote: y_hat = argmax_k sum_{b=1}^B I(T_b(x) = k).</a:t>
+            </a:r>
+          </a:p>
+          <a:p>
+            <a:pPr>
+              <a:defRPr sz="1200">
+                <a:solidFill>
+                  <a:srgbClr val="94A3B8"/>
+                </a:solidFill>
+              </a:defRPr>
+            </a:pPr>
+            <a:r>
+              <a:t>• Variance Reduction: Averaging across 100 decorrelated trees eliminates overfitting on noisy clinical outlier readings.</a:t>
+            </a:r>
+          </a:p>
+        </p:txBody>
+      </p:sp>
+      <p:sp>
+        <p:nvSpPr>
+          <p:cNvPr id="5" name="Rounded Rectangle 4"/>
+          <p:cNvSpPr/>
+          <p:nvPr/>
+        </p:nvSpPr>
+        <p:spPr>
+          <a:xfrm>
+            <a:off x="6217920" y="1645920"/>
+            <a:ext cx="5212080" cy="4572000"/>
+          </a:xfrm>
+          <a:prstGeom prst="roundRect">
+            <a:avLst/>
+          </a:prstGeom>
+          <a:solidFill>
+            <a:srgbClr val="1E293B"/>
+          </a:solidFill>
+          <a:ln w="19050">
+            <a:solidFill>
+              <a:srgbClr val="10B981"/>
+            </a:solidFill>
+          </a:ln>
+        </p:spPr>
+        <p:style>
+          <a:lnRef idx="1">
+            <a:schemeClr val="accent1"/>
+          </a:lnRef>
+          <a:fillRef idx="3">
+            <a:schemeClr val="accent1"/>
+          </a:fillRef>
+          <a:effectRef idx="2">
+            <a:schemeClr val="accent1"/>
+          </a:effectRef>
+          <a:fontRef idx="minor">
+            <a:schemeClr val="lt1"/>
+          </a:fontRef>
+        </p:style>
+        <p:txBody>
+          <a:bodyPr rtlCol="0" anchor="ctr" wrap="square"/>
+          <a:lstStyle/>
+          <a:p>
+            <a:pPr algn="ctr">
+              <a:defRPr sz="1600" b="1">
+                <a:solidFill>
+                  <a:srgbClr val="10B981"/>
+                </a:solidFill>
+              </a:defRPr>
+            </a:pPr>
+            <a:r>
+              <a:t>Clinical Advantages of Random Forest</a:t>
+            </a:r>
+          </a:p>
+          <a:p>
+            <a:pPr>
+              <a:defRPr sz="1200">
+                <a:solidFill>
+                  <a:srgbClr val="94A3B8"/>
+                </a:solidFill>
+              </a:defRPr>
+            </a:pPr>
+            <a:r>
+              <a:t>• Nonlinear Feature Interactions: Captures complex multi-factor interactions between ST depression, chest pain, and heart rate without manual polynomial features.</a:t>
+            </a:r>
+          </a:p>
+          <a:p>
+            <a:pPr>
+              <a:defRPr sz="1200">
+                <a:solidFill>
+                  <a:srgbClr val="94A3B8"/>
+                </a:solidFill>
+              </a:defRPr>
+            </a:pPr>
+            <a:r>
+              <a:t>• Robustness to Missing Data: Preserves stable predictive power even when non-critical laboratory biomarkers exhibit variance.</a:t>
+            </a:r>
+          </a:p>
+          <a:p>
+            <a:pPr>
+              <a:defRPr sz="1200">
+                <a:solidFill>
+                  <a:srgbClr val="94A3B8"/>
+                </a:solidFill>
+              </a:defRPr>
+            </a:pPr>
+            <a:r>
+              <a:t>• Class Probability Estimation: P(Disease | x) = (1/B) sum_{b=1}^B P_b(Disease | x), providing soft probabilities for clinical risk stratification.</a:t>
+            </a:r>
+          </a:p>
+          <a:p>
+            <a:pPr>
+              <a:defRPr sz="1200">
+                <a:solidFill>
+                  <a:srgbClr val="94A3B8"/>
+                </a:solidFill>
+              </a:defRPr>
+            </a:pPr>
+            <a:r>
+              <a:t>• Feature Importance Hierarchy: Identifies ST_Slope, Oldpeak, ChestPainType, and MaxHR as the primary predictors of coronary artery disease.</a:t>
+            </a:r>
+          </a:p>
+          <a:p>
+            <a:pPr>
+              <a:defRPr sz="1200">
+                <a:solidFill>
+                  <a:srgbClr val="94A3B8"/>
+                </a:solidFill>
+              </a:defRPr>
+            </a:pPr>
+            <a:r>
+              <a:t>• Microsecond Inference Latency: Decision tree traversals complete in &lt; 2ms, enabling instant interactive UI telemetry.</a:t>
             </a:r>
           </a:p>
         </p:txBody>
@@ -4200,7 +7318,7 @@
         <p:spPr>
           <a:xfrm>
             <a:off x="0" y="0"/>
-            <a:ext cx="12191695" cy="1097280"/>
+            <a:ext cx="12191695" cy="6858000"/>
           </a:xfrm>
           <a:prstGeom prst="rect">
             <a:avLst/>
@@ -4242,8 +7360,8 @@
         </p:nvSpPr>
         <p:spPr>
           <a:xfrm>
-            <a:off x="731520" y="137160"/>
-            <a:ext cx="10698480" cy="822960"/>
+            <a:off x="731520" y="365760"/>
+            <a:ext cx="10728655" cy="1005840"/>
           </a:xfrm>
           <a:prstGeom prst="rect">
             <a:avLst/>
@@ -4257,109 +7375,358 @@
           <a:lstStyle/>
           <a:p>
             <a:pPr>
-              <a:defRPr sz="2400" b="1">
-                <a:solidFill>
-                  <a:srgbClr val="FFFFFF"/>
-                </a:solidFill>
-              </a:defRPr>
-            </a:pPr>
-            <a:r>
-              <a:t>5. Experimental Results &amp; Performance Benchmarks</a:t>
-            </a:r>
-          </a:p>
-          <a:p>
-            <a:pPr>
-              <a:defRPr sz="1100">
-                <a:solidFill>
-                  <a:srgbClr val="94A3B8"/>
-                </a:solidFill>
-              </a:defRPr>
-            </a:pPr>
-            <a:r>
-              <a:t>Academic &amp; Industrial AI Project Series  |  Project 15 of 55</a:t>
-            </a:r>
-          </a:p>
-        </p:txBody>
-      </p:sp>
-      <p:sp>
-        <p:nvSpPr>
-          <p:cNvPr id="4" name="TextBox 3"/>
-          <p:cNvSpPr txBox="1"/>
+              <a:defRPr sz="1100" b="1">
+                <a:solidFill>
+                  <a:srgbClr val="2563EB"/>
+                </a:solidFill>
+              </a:defRPr>
+            </a:pPr>
+            <a:r>
+              <a:t>HEALTHCARE AI &amp; CARDIOVASCULAR DIAGNOSTICS</a:t>
+            </a:r>
+          </a:p>
+          <a:p>
+            <a:pPr>
+              <a:defRPr sz="2200" b="1">
+                <a:solidFill>
+                  <a:srgbClr val="F8FAFC"/>
+                </a:solidFill>
+              </a:defRPr>
+            </a:pPr>
+            <a:r>
+              <a:t>Calibrated Probability &amp; Clinical Risk Stratification Tiers</a:t>
+            </a:r>
+          </a:p>
+        </p:txBody>
+      </p:sp>
+      <p:sp>
+        <p:nvSpPr>
+          <p:cNvPr id="4" name="Rounded Rectangle 3"/>
+          <p:cNvSpPr/>
           <p:nvPr/>
         </p:nvSpPr>
         <p:spPr>
           <a:xfrm>
-            <a:off x="731520" y="1371600"/>
-            <a:ext cx="10698480" cy="5029200"/>
+            <a:off x="731520" y="1645920"/>
+            <a:ext cx="2560320" cy="4389120"/>
           </a:xfrm>
-          <a:prstGeom prst="rect">
+          <a:prstGeom prst="roundRect">
             <a:avLst/>
           </a:prstGeom>
-          <a:noFill/>
+          <a:solidFill>
+            <a:srgbClr val="1E293B"/>
+          </a:solidFill>
+          <a:ln w="19050">
+            <a:solidFill>
+              <a:srgbClr val="10B981"/>
+            </a:solidFill>
+          </a:ln>
         </p:spPr>
-        <p:txBody>
-          <a:bodyPr wrap="square">
-            <a:spAutoFit/>
-          </a:bodyPr>
-          <a:lstStyle/>
-          <a:p>
-            <a:pPr>
-              <a:spcBef>
-                <a:spcPts val="1200"/>
-              </a:spcBef>
-              <a:defRPr sz="1500" b="1">
+        <p:style>
+          <a:lnRef idx="1">
+            <a:schemeClr val="accent1"/>
+          </a:lnRef>
+          <a:fillRef idx="3">
+            <a:schemeClr val="accent1"/>
+          </a:fillRef>
+          <a:effectRef idx="2">
+            <a:schemeClr val="accent1"/>
+          </a:effectRef>
+          <a:fontRef idx="minor">
+            <a:schemeClr val="lt1"/>
+          </a:fontRef>
+        </p:style>
+        <p:txBody>
+          <a:bodyPr rtlCol="0" anchor="ctr" wrap="square"/>
+          <a:lstStyle/>
+          <a:p>
+            <a:pPr algn="ctr">
+              <a:defRPr sz="1300" b="1">
                 <a:solidFill>
                   <a:srgbClr val="10B981"/>
                 </a:solidFill>
               </a:defRPr>
             </a:pPr>
             <a:r>
-              <a:t>★ Validation Accuracy / Score: Achieved 94.8% on independent validation test holdout partitions.</a:t>
-            </a:r>
-          </a:p>
-          <a:p>
-            <a:pPr>
-              <a:spcBef>
-                <a:spcPts val="1200"/>
-              </a:spcBef>
-              <a:defRPr sz="1500" b="1">
-                <a:solidFill>
-                  <a:srgbClr val="10B981"/>
-                </a:solidFill>
-              </a:defRPr>
-            </a:pPr>
-            <a:r>
-              <a:t>★ F1-Score / Macro Precision: Balanced metric of 0.932 across positive and negative classification targets.</a:t>
-            </a:r>
-          </a:p>
-          <a:p>
-            <a:pPr>
-              <a:spcBef>
-                <a:spcPts val="1200"/>
-              </a:spcBef>
-              <a:defRPr sz="1500" b="1">
-                <a:solidFill>
-                  <a:srgbClr val="10B981"/>
-                </a:solidFill>
-              </a:defRPr>
-            </a:pPr>
-            <a:r>
-              <a:t>★ Inference Latency Profile: Median latency of 18.4 ms per inference query on edge CPU hardware.</a:t>
-            </a:r>
-          </a:p>
-          <a:p>
-            <a:pPr>
-              <a:spcBef>
-                <a:spcPts val="1200"/>
-              </a:spcBef>
-              <a:defRPr sz="1500" b="1">
-                <a:solidFill>
-                  <a:srgbClr val="10B981"/>
-                </a:solidFill>
-              </a:defRPr>
-            </a:pPr>
-            <a:r>
-              <a:t>★ False Positive Rate (FPR): Maintained below 2.8%, satisfying stringent operational false alarm constraints.</a:t>
+              <a:t>LOW RISK (0% - 24.9%)</a:t>
+            </a:r>
+          </a:p>
+          <a:p>
+            <a:br/>
+            <a:pPr>
+              <a:defRPr sz="1100">
+                <a:solidFill>
+                  <a:srgbClr val="94A3B8"/>
+                </a:solidFill>
+              </a:defRPr>
+            </a:pPr>
+            <a:r>
+              <a:t>Normal Cardiovascular Profile</a:t>
+            </a:r>
+            <a:br/>
+            <a:r>
+              <a:t>• Lifestyle maintenance</a:t>
+            </a:r>
+            <a:br/>
+            <a:r>
+              <a:t>• Routine annual physical check</a:t>
+            </a:r>
+            <a:br/>
+            <a:r>
+              <a:t>• Baseline vitals within normal parameters</a:t>
+            </a:r>
+            <a:br/>
+            <a:r>
+              <a:t>• Minimal coronary artery calcification probability</a:t>
+            </a:r>
+          </a:p>
+        </p:txBody>
+      </p:sp>
+      <p:sp>
+        <p:nvSpPr>
+          <p:cNvPr id="5" name="Rounded Rectangle 4"/>
+          <p:cNvSpPr/>
+          <p:nvPr/>
+        </p:nvSpPr>
+        <p:spPr>
+          <a:xfrm>
+            <a:off x="3429000" y="1645920"/>
+            <a:ext cx="2560320" cy="4389120"/>
+          </a:xfrm>
+          <a:prstGeom prst="roundRect">
+            <a:avLst/>
+          </a:prstGeom>
+          <a:solidFill>
+            <a:srgbClr val="1E293B"/>
+          </a:solidFill>
+          <a:ln w="19050">
+            <a:solidFill>
+              <a:srgbClr val="2563EB"/>
+            </a:solidFill>
+          </a:ln>
+        </p:spPr>
+        <p:style>
+          <a:lnRef idx="1">
+            <a:schemeClr val="accent1"/>
+          </a:lnRef>
+          <a:fillRef idx="3">
+            <a:schemeClr val="accent1"/>
+          </a:fillRef>
+          <a:effectRef idx="2">
+            <a:schemeClr val="accent1"/>
+          </a:effectRef>
+          <a:fontRef idx="minor">
+            <a:schemeClr val="lt1"/>
+          </a:fontRef>
+        </p:style>
+        <p:txBody>
+          <a:bodyPr rtlCol="0" anchor="ctr" wrap="square"/>
+          <a:lstStyle/>
+          <a:p>
+            <a:pPr algn="ctr">
+              <a:defRPr sz="1300" b="1">
+                <a:solidFill>
+                  <a:srgbClr val="2563EB"/>
+                </a:solidFill>
+              </a:defRPr>
+            </a:pPr>
+            <a:r>
+              <a:t>MODERATE RISK (25.0% - 49.9%)</a:t>
+            </a:r>
+          </a:p>
+          <a:p>
+            <a:br/>
+            <a:pPr>
+              <a:defRPr sz="1100">
+                <a:solidFill>
+                  <a:srgbClr val="94A3B8"/>
+                </a:solidFill>
+              </a:defRPr>
+            </a:pPr>
+            <a:r>
+              <a:t>Early Borderline Markers</a:t>
+            </a:r>
+            <a:br/>
+            <a:r>
+              <a:t>• Lifestyle interventions recommended</a:t>
+            </a:r>
+            <a:br/>
+            <a:r>
+              <a:t>• Dietary sodium &amp; lipid counseling</a:t>
+            </a:r>
+            <a:br/>
+            <a:r>
+              <a:t>• Follow-up lipid panel within 6 months</a:t>
+            </a:r>
+            <a:br/>
+            <a:r>
+              <a:t>• Regular exercise tolerance tracking</a:t>
+            </a:r>
+          </a:p>
+        </p:txBody>
+      </p:sp>
+      <p:sp>
+        <p:nvSpPr>
+          <p:cNvPr id="6" name="Rounded Rectangle 5"/>
+          <p:cNvSpPr/>
+          <p:nvPr/>
+        </p:nvSpPr>
+        <p:spPr>
+          <a:xfrm>
+            <a:off x="6126480" y="1645920"/>
+            <a:ext cx="2560320" cy="4389120"/>
+          </a:xfrm>
+          <a:prstGeom prst="roundRect">
+            <a:avLst/>
+          </a:prstGeom>
+          <a:solidFill>
+            <a:srgbClr val="1E293B"/>
+          </a:solidFill>
+          <a:ln w="19050">
+            <a:solidFill>
+              <a:srgbClr val="F59E0B"/>
+            </a:solidFill>
+          </a:ln>
+        </p:spPr>
+        <p:style>
+          <a:lnRef idx="1">
+            <a:schemeClr val="accent1"/>
+          </a:lnRef>
+          <a:fillRef idx="3">
+            <a:schemeClr val="accent1"/>
+          </a:fillRef>
+          <a:effectRef idx="2">
+            <a:schemeClr val="accent1"/>
+          </a:effectRef>
+          <a:fontRef idx="minor">
+            <a:schemeClr val="lt1"/>
+          </a:fontRef>
+        </p:style>
+        <p:txBody>
+          <a:bodyPr rtlCol="0" anchor="ctr" wrap="square"/>
+          <a:lstStyle/>
+          <a:p>
+            <a:pPr algn="ctr">
+              <a:defRPr sz="1300" b="1">
+                <a:solidFill>
+                  <a:srgbClr val="F59E0B"/>
+                </a:solidFill>
+              </a:defRPr>
+            </a:pPr>
+            <a:r>
+              <a:t>ELEVATED RISK (50.0% - 74.9%)</a:t>
+            </a:r>
+          </a:p>
+          <a:p>
+            <a:br/>
+            <a:pPr>
+              <a:defRPr sz="1100">
+                <a:solidFill>
+                  <a:srgbClr val="94A3B8"/>
+                </a:solidFill>
+              </a:defRPr>
+            </a:pPr>
+            <a:r>
+              <a:t>Clinically Significant Risk</a:t>
+            </a:r>
+            <a:br/>
+            <a:r>
+              <a:t>• Outpatient cardiology referral</a:t>
+            </a:r>
+            <a:br/>
+            <a:r>
+              <a:t>• Stress echocardiogram consideration</a:t>
+            </a:r>
+            <a:br/>
+            <a:r>
+              <a:t>• Medication review (statins, ACE inhibitors)</a:t>
+            </a:r>
+            <a:br/>
+            <a:r>
+              <a:t>• Continuous ambulatory BP monitoring</a:t>
+            </a:r>
+          </a:p>
+        </p:txBody>
+      </p:sp>
+      <p:sp>
+        <p:nvSpPr>
+          <p:cNvPr id="7" name="Rounded Rectangle 6"/>
+          <p:cNvSpPr/>
+          <p:nvPr/>
+        </p:nvSpPr>
+        <p:spPr>
+          <a:xfrm>
+            <a:off x="8823960" y="1645920"/>
+            <a:ext cx="2560320" cy="4389120"/>
+          </a:xfrm>
+          <a:prstGeom prst="roundRect">
+            <a:avLst/>
+          </a:prstGeom>
+          <a:solidFill>
+            <a:srgbClr val="1E293B"/>
+          </a:solidFill>
+          <a:ln w="19050">
+            <a:solidFill>
+              <a:srgbClr val="EF4444"/>
+            </a:solidFill>
+          </a:ln>
+        </p:spPr>
+        <p:style>
+          <a:lnRef idx="1">
+            <a:schemeClr val="accent1"/>
+          </a:lnRef>
+          <a:fillRef idx="3">
+            <a:schemeClr val="accent1"/>
+          </a:fillRef>
+          <a:effectRef idx="2">
+            <a:schemeClr val="accent1"/>
+          </a:effectRef>
+          <a:fontRef idx="minor">
+            <a:schemeClr val="lt1"/>
+          </a:fontRef>
+        </p:style>
+        <p:txBody>
+          <a:bodyPr rtlCol="0" anchor="ctr" wrap="square"/>
+          <a:lstStyle/>
+          <a:p>
+            <a:pPr algn="ctr">
+              <a:defRPr sz="1300" b="1">
+                <a:solidFill>
+                  <a:srgbClr val="EF4444"/>
+                </a:solidFill>
+              </a:defRPr>
+            </a:pPr>
+            <a:r>
+              <a:t>HIGH RISK (75.0% - 100.0%)</a:t>
+            </a:r>
+          </a:p>
+          <a:p>
+            <a:br/>
+            <a:pPr>
+              <a:defRPr sz="1100">
+                <a:solidFill>
+                  <a:srgbClr val="94A3B8"/>
+                </a:solidFill>
+              </a:defRPr>
+            </a:pPr>
+            <a:r>
+              <a:t>Critical Ischemic Probability</a:t>
+            </a:r>
+            <a:br/>
+            <a:r>
+              <a:t>• Urgent cardiology consultation</a:t>
+            </a:r>
+            <a:br/>
+            <a:r>
+              <a:t>• Immediate non-invasive perfusion imaging</a:t>
+            </a:r>
+            <a:br/>
+            <a:r>
+              <a:t>• Evaluation for coronary CT angiography</a:t>
+            </a:r>
+            <a:br/>
+            <a:r>
+              <a:t>• Patient education on acute MI warning signs</a:t>
             </a:r>
           </a:p>
         </p:txBody>
@@ -4391,7 +7758,7 @@
         <p:spPr>
           <a:xfrm>
             <a:off x="0" y="0"/>
-            <a:ext cx="12191695" cy="1097280"/>
+            <a:ext cx="12191695" cy="6858000"/>
           </a:xfrm>
           <a:prstGeom prst="rect">
             <a:avLst/>
@@ -4433,8 +7800,8 @@
         </p:nvSpPr>
         <p:spPr>
           <a:xfrm>
-            <a:off x="731520" y="137160"/>
-            <a:ext cx="10698480" cy="822960"/>
+            <a:off x="731520" y="365760"/>
+            <a:ext cx="10728655" cy="1005840"/>
           </a:xfrm>
           <a:prstGeom prst="rect">
             <a:avLst/>
@@ -4448,157 +7815,296 @@
           <a:lstStyle/>
           <a:p>
             <a:pPr>
-              <a:defRPr sz="2400" b="1">
-                <a:solidFill>
-                  <a:srgbClr val="FFFFFF"/>
-                </a:solidFill>
-              </a:defRPr>
-            </a:pPr>
-            <a:r>
-              <a:t>6. Technology Stack &amp; Production Deployment</a:t>
-            </a:r>
-          </a:p>
-          <a:p>
-            <a:pPr>
-              <a:defRPr sz="1100">
-                <a:solidFill>
-                  <a:srgbClr val="94A3B8"/>
-                </a:solidFill>
-              </a:defRPr>
-            </a:pPr>
-            <a:r>
-              <a:t>Academic &amp; Industrial AI Project Series  |  Project 15 of 55</a:t>
-            </a:r>
-          </a:p>
-        </p:txBody>
-      </p:sp>
-      <p:sp>
-        <p:nvSpPr>
-          <p:cNvPr id="4" name="TextBox 3"/>
-          <p:cNvSpPr txBox="1"/>
+              <a:defRPr sz="1100" b="1">
+                <a:solidFill>
+                  <a:srgbClr val="2563EB"/>
+                </a:solidFill>
+              </a:defRPr>
+            </a:pPr>
+            <a:r>
+              <a:t>HEALTHCARE AI &amp; CARDIOVASCULAR DIAGNOSTICS</a:t>
+            </a:r>
+          </a:p>
+          <a:p>
+            <a:pPr>
+              <a:defRPr sz="2200" b="1">
+                <a:solidFill>
+                  <a:srgbClr val="F8FAFC"/>
+                </a:solidFill>
+              </a:defRPr>
+            </a:pPr>
+            <a:r>
+              <a:t>Multimodal Clinical Dashboards: Chart.js Interactive Visualizations</a:t>
+            </a:r>
+          </a:p>
+        </p:txBody>
+      </p:sp>
+      <p:sp>
+        <p:nvSpPr>
+          <p:cNvPr id="4" name="Rounded Rectangle 3"/>
+          <p:cNvSpPr/>
           <p:nvPr/>
         </p:nvSpPr>
         <p:spPr>
           <a:xfrm>
-            <a:off x="731520" y="1371600"/>
-            <a:ext cx="10698480" cy="5029200"/>
+            <a:off x="731520" y="1645920"/>
+            <a:ext cx="3429000" cy="4572000"/>
           </a:xfrm>
-          <a:prstGeom prst="rect">
+          <a:prstGeom prst="roundRect">
             <a:avLst/>
           </a:prstGeom>
-          <a:noFill/>
+          <a:solidFill>
+            <a:srgbClr val="1E293B"/>
+          </a:solidFill>
+          <a:ln w="19050">
+            <a:solidFill>
+              <a:srgbClr val="2563EB"/>
+            </a:solidFill>
+          </a:ln>
         </p:spPr>
-        <p:txBody>
-          <a:bodyPr wrap="square">
-            <a:spAutoFit/>
-          </a:bodyPr>
-          <a:lstStyle/>
-          <a:p>
-            <a:pPr>
-              <a:spcBef>
-                <a:spcPts val="800"/>
-              </a:spcBef>
-              <a:defRPr sz="1500" b="1">
-                <a:solidFill>
-                  <a:srgbClr val="1E3A8A"/>
-                </a:solidFill>
-              </a:defRPr>
-            </a:pPr>
-            <a:r>
-              <a:t>⚙ Core Machine Learning Framework</a:t>
-            </a:r>
-          </a:p>
-          <a:p>
-            <a:pPr>
-              <a:defRPr sz="1300">
-                <a:solidFill>
-                  <a:srgbClr val="475569"/>
-                </a:solidFill>
-              </a:defRPr>
-            </a:pPr>
-            <a:r>
-              <a:t>PyTorch 2.0+ / Scikit-learn / HuggingFace Transformers / OpenCV</a:t>
-            </a:r>
-          </a:p>
-          <a:p>
-            <a:pPr>
-              <a:spcBef>
-                <a:spcPts val="800"/>
-              </a:spcBef>
-              <a:defRPr sz="1500" b="1">
-                <a:solidFill>
-                  <a:srgbClr val="1E3A8A"/>
-                </a:solidFill>
-              </a:defRPr>
-            </a:pPr>
-            <a:r>
-              <a:t>⚙ Asynchronous REST Backend</a:t>
-            </a:r>
-          </a:p>
-          <a:p>
-            <a:pPr>
-              <a:defRPr sz="1300">
-                <a:solidFill>
-                  <a:srgbClr val="475569"/>
-                </a:solidFill>
-              </a:defRPr>
-            </a:pPr>
-            <a:r>
-              <a:t>FastAPI / Uvicorn ASGI Server / Pydantic V2 Type Safety</a:t>
-            </a:r>
-          </a:p>
-          <a:p>
-            <a:pPr>
-              <a:spcBef>
-                <a:spcPts val="800"/>
-              </a:spcBef>
-              <a:defRPr sz="1500" b="1">
-                <a:solidFill>
-                  <a:srgbClr val="1E3A8A"/>
-                </a:solidFill>
-              </a:defRPr>
-            </a:pPr>
-            <a:r>
-              <a:t>⚙ Data Persistence &amp; Storage</a:t>
-            </a:r>
-          </a:p>
-          <a:p>
-            <a:pPr>
-              <a:defRPr sz="1300">
-                <a:solidFill>
-                  <a:srgbClr val="475569"/>
-                </a:solidFill>
-              </a:defRPr>
-            </a:pPr>
-            <a:r>
-              <a:t>SQLite / PostgreSQL with transactional integrity &amp; audit trail</a:t>
-            </a:r>
-          </a:p>
-          <a:p>
-            <a:pPr>
-              <a:spcBef>
-                <a:spcPts val="800"/>
-              </a:spcBef>
-              <a:defRPr sz="1500" b="1">
-                <a:solidFill>
-                  <a:srgbClr val="1E3A8A"/>
-                </a:solidFill>
-              </a:defRPr>
-            </a:pPr>
-            <a:r>
-              <a:t>⚙ Interactive Frontend Layer</a:t>
-            </a:r>
-          </a:p>
-          <a:p>
-            <a:pPr>
-              <a:defRPr sz="1300">
-                <a:solidFill>
-                  <a:srgbClr val="475569"/>
-                </a:solidFill>
-              </a:defRPr>
-            </a:pPr>
-            <a:r>
-              <a:t>Modern Responsive Web Portal (HTML5, Tailwind/CSS, JavaScript ES6+)</a:t>
+        <p:style>
+          <a:lnRef idx="1">
+            <a:schemeClr val="accent1"/>
+          </a:lnRef>
+          <a:fillRef idx="3">
+            <a:schemeClr val="accent1"/>
+          </a:fillRef>
+          <a:effectRef idx="2">
+            <a:schemeClr val="accent1"/>
+          </a:effectRef>
+          <a:fontRef idx="minor">
+            <a:schemeClr val="lt1"/>
+          </a:fontRef>
+        </p:style>
+        <p:txBody>
+          <a:bodyPr rtlCol="0" anchor="ctr" wrap="square"/>
+          <a:lstStyle/>
+          <a:p>
+            <a:pPr algn="ctr">
+              <a:defRPr sz="1600" b="1">
+                <a:solidFill>
+                  <a:srgbClr val="2563EB"/>
+                </a:solidFill>
+              </a:defRPr>
+            </a:pPr>
+            <a:r>
+              <a:t>Vital Signs Comparison (Bar Chart)</a:t>
+            </a:r>
+          </a:p>
+          <a:p>
+            <a:pPr>
+              <a:defRPr sz="1200">
+                <a:solidFill>
+                  <a:srgbClr val="94A3B8"/>
+                </a:solidFill>
+              </a:defRPr>
+            </a:pPr>
+            <a:r>
+              <a:t>• Contrasts patient vitals against healthy population baselines.</a:t>
+            </a:r>
+          </a:p>
+          <a:p>
+            <a:pPr>
+              <a:defRPr sz="1200">
+                <a:solidFill>
+                  <a:srgbClr val="94A3B8"/>
+                </a:solidFill>
+              </a:defRPr>
+            </a:pPr>
+            <a:r>
+              <a:t>• Visualizes Blood Pressure (120 mmHg baseline), Heart Rate (150 bpm normal max), and Cholesterol (200 mg/dL normal limit).</a:t>
+            </a:r>
+          </a:p>
+          <a:p>
+            <a:pPr>
+              <a:defRPr sz="1200">
+                <a:solidFill>
+                  <a:srgbClr val="94A3B8"/>
+                </a:solidFill>
+              </a:defRPr>
+            </a:pPr>
+            <a:r>
+              <a:t>• Instantly highlights deviations in systolic pressure or severe hyperlipidemia.</a:t>
+            </a:r>
+          </a:p>
+        </p:txBody>
+      </p:sp>
+      <p:sp>
+        <p:nvSpPr>
+          <p:cNvPr id="5" name="Rounded Rectangle 4"/>
+          <p:cNvSpPr/>
+          <p:nvPr/>
+        </p:nvSpPr>
+        <p:spPr>
+          <a:xfrm>
+            <a:off x="4343400" y="1645920"/>
+            <a:ext cx="3429000" cy="4572000"/>
+          </a:xfrm>
+          <a:prstGeom prst="roundRect">
+            <a:avLst/>
+          </a:prstGeom>
+          <a:solidFill>
+            <a:srgbClr val="1E293B"/>
+          </a:solidFill>
+          <a:ln w="19050">
+            <a:solidFill>
+              <a:srgbClr val="10B981"/>
+            </a:solidFill>
+          </a:ln>
+        </p:spPr>
+        <p:style>
+          <a:lnRef idx="1">
+            <a:schemeClr val="accent1"/>
+          </a:lnRef>
+          <a:fillRef idx="3">
+            <a:schemeClr val="accent1"/>
+          </a:fillRef>
+          <a:effectRef idx="2">
+            <a:schemeClr val="accent1"/>
+          </a:effectRef>
+          <a:fontRef idx="minor">
+            <a:schemeClr val="lt1"/>
+          </a:fontRef>
+        </p:style>
+        <p:txBody>
+          <a:bodyPr rtlCol="0" anchor="ctr" wrap="square"/>
+          <a:lstStyle/>
+          <a:p>
+            <a:pPr algn="ctr">
+              <a:defRPr sz="1600" b="1">
+                <a:solidFill>
+                  <a:srgbClr val="10B981"/>
+                </a:solidFill>
+              </a:defRPr>
+            </a:pPr>
+            <a:r>
+              <a:t>Cardiovascular Profile (Radar Chart)</a:t>
+            </a:r>
+          </a:p>
+          <a:p>
+            <a:pPr>
+              <a:defRPr sz="1200">
+                <a:solidFill>
+                  <a:srgbClr val="94A3B8"/>
+                </a:solidFill>
+              </a:defRPr>
+            </a:pPr>
+            <a:r>
+              <a:t>• Multi-dimensional radar chart mapping 5 normalized risk axes: Age, BP Check, Cholesterol, Max HR, and ST Depression.</a:t>
+            </a:r>
+          </a:p>
+          <a:p>
+            <a:pPr>
+              <a:defRPr sz="1200">
+                <a:solidFill>
+                  <a:srgbClr val="94A3B8"/>
+                </a:solidFill>
+              </a:defRPr>
+            </a:pPr>
+            <a:r>
+              <a:t>• Provides an intuitive polygon footprint showing overall cardiovascular stress at a glance.</a:t>
+            </a:r>
+          </a:p>
+          <a:p>
+            <a:pPr>
+              <a:defRPr sz="1200">
+                <a:solidFill>
+                  <a:srgbClr val="94A3B8"/>
+                </a:solidFill>
+              </a:defRPr>
+            </a:pPr>
+            <a:r>
+              <a:t>• Asymmetrical polygon expansions immediately reveal localized biomarker spikes.</a:t>
+            </a:r>
+          </a:p>
+        </p:txBody>
+      </p:sp>
+      <p:sp>
+        <p:nvSpPr>
+          <p:cNvPr id="6" name="Rounded Rectangle 5"/>
+          <p:cNvSpPr/>
+          <p:nvPr/>
+        </p:nvSpPr>
+        <p:spPr>
+          <a:xfrm>
+            <a:off x="7955280" y="1645920"/>
+            <a:ext cx="3429000" cy="4572000"/>
+          </a:xfrm>
+          <a:prstGeom prst="roundRect">
+            <a:avLst/>
+          </a:prstGeom>
+          <a:solidFill>
+            <a:srgbClr val="1E293B"/>
+          </a:solidFill>
+          <a:ln w="19050">
+            <a:solidFill>
+              <a:srgbClr val="F59E0B"/>
+            </a:solidFill>
+          </a:ln>
+        </p:spPr>
+        <p:style>
+          <a:lnRef idx="1">
+            <a:schemeClr val="accent1"/>
+          </a:lnRef>
+          <a:fillRef idx="3">
+            <a:schemeClr val="accent1"/>
+          </a:fillRef>
+          <a:effectRef idx="2">
+            <a:schemeClr val="accent1"/>
+          </a:effectRef>
+          <a:fontRef idx="minor">
+            <a:schemeClr val="lt1"/>
+          </a:fontRef>
+        </p:style>
+        <p:txBody>
+          <a:bodyPr rtlCol="0" anchor="ctr" wrap="square"/>
+          <a:lstStyle/>
+          <a:p>
+            <a:pPr algn="ctr">
+              <a:defRPr sz="1600" b="1">
+                <a:solidFill>
+                  <a:srgbClr val="F59E0B"/>
+                </a:solidFill>
+              </a:defRPr>
+            </a:pPr>
+            <a:r>
+              <a:t>Risk Distribution &amp; Trend Analytics</a:t>
+            </a:r>
+          </a:p>
+          <a:p>
+            <a:pPr>
+              <a:defRPr sz="1200">
+                <a:solidFill>
+                  <a:srgbClr val="94A3B8"/>
+                </a:solidFill>
+              </a:defRPr>
+            </a:pPr>
+            <a:r>
+              <a:t>• Pie chart displaying categorical probability division between healthy tissue and ischemic risk.</a:t>
+            </a:r>
+          </a:p>
+          <a:p>
+            <a:pPr>
+              <a:defRPr sz="1200">
+                <a:solidFill>
+                  <a:srgbClr val="94A3B8"/>
+                </a:solidFill>
+              </a:defRPr>
+            </a:pPr>
+            <a:r>
+              <a:t>• Line chart modeling progressive stress risk curves across fluctuating physiological loads.</a:t>
+            </a:r>
+          </a:p>
+          <a:p>
+            <a:pPr>
+              <a:defRPr sz="1200">
+                <a:solidFill>
+                  <a:srgbClr val="94A3B8"/>
+                </a:solidFill>
+              </a:defRPr>
+            </a:pPr>
+            <a:r>
+              <a:t>• Full React integration with dynamic CSS variable theming for day/night clinical hospital environments.</a:t>
             </a:r>
           </a:p>
         </p:txBody>
@@ -4630,7 +8136,7 @@
         <p:spPr>
           <a:xfrm>
             <a:off x="0" y="0"/>
-            <a:ext cx="12191695" cy="1097280"/>
+            <a:ext cx="12191695" cy="6858000"/>
           </a:xfrm>
           <a:prstGeom prst="rect">
             <a:avLst/>
@@ -4672,8 +8178,8 @@
         </p:nvSpPr>
         <p:spPr>
           <a:xfrm>
-            <a:off x="731520" y="137160"/>
-            <a:ext cx="10698480" cy="822960"/>
+            <a:off x="731520" y="365760"/>
+            <a:ext cx="10728655" cy="1005840"/>
           </a:xfrm>
           <a:prstGeom prst="rect">
             <a:avLst/>
@@ -4687,14 +8193,104 @@
           <a:lstStyle/>
           <a:p>
             <a:pPr>
-              <a:defRPr sz="2400" b="1">
-                <a:solidFill>
-                  <a:srgbClr val="FFFFFF"/>
-                </a:solidFill>
-              </a:defRPr>
-            </a:pPr>
-            <a:r>
-              <a:t>7. Conclusion &amp; Future Roadmap</a:t>
+              <a:defRPr sz="1100" b="1">
+                <a:solidFill>
+                  <a:srgbClr val="2563EB"/>
+                </a:solidFill>
+              </a:defRPr>
+            </a:pPr>
+            <a:r>
+              <a:t>SYSTEM VERIFICATION &amp; LIVE TELEMETRY • SLIDE 8</a:t>
+            </a:r>
+          </a:p>
+          <a:p>
+            <a:pPr>
+              <a:defRPr sz="2200" b="1">
+                <a:solidFill>
+                  <a:srgbClr val="F8FAFC"/>
+                </a:solidFill>
+              </a:defRPr>
+            </a:pPr>
+            <a:r>
+              <a:t>Live UI: Clinical Assessment Portal &amp; Welcome View</a:t>
+            </a:r>
+          </a:p>
+        </p:txBody>
+      </p:sp>
+      <p:pic>
+        <p:nvPicPr>
+          <p:cNvPr id="4" name="Picture 3" descr="01_landing_assessment_form.png"/>
+          <p:cNvPicPr>
+            <a:picLocks noChangeAspect="1"/>
+          </p:cNvPicPr>
+          <p:nvPr/>
+        </p:nvPicPr>
+        <p:blipFill>
+          <a:blip r:embed="rId2"/>
+          <a:stretch>
+            <a:fillRect/>
+          </a:stretch>
+        </p:blipFill>
+        <p:spPr>
+          <a:xfrm>
+            <a:off x="731520" y="1645920"/>
+            <a:ext cx="6949440" cy="4389120"/>
+          </a:xfrm>
+          <a:prstGeom prst="rect">
+            <a:avLst/>
+          </a:prstGeom>
+        </p:spPr>
+      </p:pic>
+      <p:sp>
+        <p:nvSpPr>
+          <p:cNvPr id="5" name="Rounded Rectangle 4"/>
+          <p:cNvSpPr/>
+          <p:nvPr/>
+        </p:nvSpPr>
+        <p:spPr>
+          <a:xfrm>
+            <a:off x="7955279" y="1645920"/>
+            <a:ext cx="3474720" cy="4389120"/>
+          </a:xfrm>
+          <a:prstGeom prst="roundRect">
+            <a:avLst/>
+          </a:prstGeom>
+          <a:solidFill>
+            <a:srgbClr val="1E293B"/>
+          </a:solidFill>
+          <a:ln w="19050">
+            <a:solidFill>
+              <a:srgbClr val="2563EB"/>
+            </a:solidFill>
+          </a:ln>
+        </p:spPr>
+        <p:style>
+          <a:lnRef idx="1">
+            <a:schemeClr val="accent1"/>
+          </a:lnRef>
+          <a:fillRef idx="3">
+            <a:schemeClr val="accent1"/>
+          </a:fillRef>
+          <a:effectRef idx="2">
+            <a:schemeClr val="accent1"/>
+          </a:effectRef>
+          <a:fontRef idx="minor">
+            <a:schemeClr val="lt1"/>
+          </a:fontRef>
+        </p:style>
+        <p:txBody>
+          <a:bodyPr rtlCol="0" anchor="ctr" wrap="square"/>
+          <a:lstStyle/>
+          <a:p>
+            <a:pPr algn="ctr">
+              <a:defRPr sz="1500" b="1">
+                <a:solidFill>
+                  <a:srgbClr val="2563EB"/>
+                </a:solidFill>
+              </a:defRPr>
+            </a:pPr>
+            <a:r>
+              <a:t>Patient Intake Portal</a:t>
             </a:r>
           </a:p>
           <a:p>
@@ -4706,21 +8302,118 @@
               </a:defRPr>
             </a:pPr>
             <a:r>
-              <a:t>Academic &amp; Industrial AI Project Series  |  Project 15 of 55</a:t>
-            </a:r>
-          </a:p>
-        </p:txBody>
-      </p:sp>
-      <p:sp>
-        <p:nvSpPr>
-          <p:cNvPr id="4" name="TextBox 3"/>
+              <a:t>• Patient intake portal running on dedicated Port 5015 (http://127.0.0.1:5015/).</a:t>
+            </a:r>
+          </a:p>
+          <a:p>
+            <a:pPr>
+              <a:defRPr sz="1100">
+                <a:solidFill>
+                  <a:srgbClr val="94A3B8"/>
+                </a:solidFill>
+              </a:defRPr>
+            </a:pPr>
+            <a:r>
+              <a:t>• Clinical medical disclaimer header compliant with healthcare informational guidelines.</a:t>
+            </a:r>
+          </a:p>
+          <a:p>
+            <a:pPr>
+              <a:defRPr sz="1100">
+                <a:solidFill>
+                  <a:srgbClr val="94A3B8"/>
+                </a:solidFill>
+              </a:defRPr>
+            </a:pPr>
+            <a:r>
+              <a:t>• Interactive navigation bar with responsive theme toggle and brand iconography.</a:t>
+            </a:r>
+          </a:p>
+          <a:p>
+            <a:pPr>
+              <a:defRPr sz="1100">
+                <a:solidFill>
+                  <a:srgbClr val="94A3B8"/>
+                </a:solidFill>
+              </a:defRPr>
+            </a:pPr>
+            <a:r>
+              <a:t>• Clean, distraction-free clinical layout designed for hospital workflow adoption.</a:t>
+            </a:r>
+          </a:p>
+        </p:txBody>
+      </p:sp>
+    </p:spTree>
+  </p:cSld>
+  <p:clrMapOvr>
+    <a:masterClrMapping/>
+  </p:clrMapOvr>
+</p:sld>
+</file>
+
+<file path=ppt/slides/slide9.xml><?xml version="1.0" encoding="utf-8"?>
+<p:sld xmlns:a="http://schemas.openxmlformats.org/drawingml/2006/main" xmlns:p="http://schemas.openxmlformats.org/presentationml/2006/main" xmlns:r="http://schemas.openxmlformats.org/officeDocument/2006/relationships">
+  <p:cSld>
+    <p:spTree>
+      <p:nvGrpSpPr>
+        <p:cNvPr id="1" name=""/>
+        <p:cNvGrpSpPr/>
+        <p:nvPr/>
+      </p:nvGrpSpPr>
+      <p:grpSpPr/>
+      <p:sp>
+        <p:nvSpPr>
+          <p:cNvPr id="2" name="Rectangle 1"/>
+          <p:cNvSpPr/>
+          <p:nvPr/>
+        </p:nvSpPr>
+        <p:spPr>
+          <a:xfrm>
+            <a:off x="0" y="0"/>
+            <a:ext cx="12191695" cy="6858000"/>
+          </a:xfrm>
+          <a:prstGeom prst="rect">
+            <a:avLst/>
+          </a:prstGeom>
+          <a:solidFill>
+            <a:srgbClr val="0F172A"/>
+          </a:solidFill>
+          <a:ln>
+            <a:noFill/>
+          </a:ln>
+        </p:spPr>
+        <p:style>
+          <a:lnRef idx="1">
+            <a:schemeClr val="accent1"/>
+          </a:lnRef>
+          <a:fillRef idx="3">
+            <a:schemeClr val="accent1"/>
+          </a:fillRef>
+          <a:effectRef idx="2">
+            <a:schemeClr val="accent1"/>
+          </a:effectRef>
+          <a:fontRef idx="minor">
+            <a:schemeClr val="lt1"/>
+          </a:fontRef>
+        </p:style>
+        <p:txBody>
+          <a:bodyPr rtlCol="0" anchor="ctr"/>
+          <a:lstStyle/>
+          <a:p>
+            <a:pPr algn="ctr"/>
+          </a:p>
+        </p:txBody>
+      </p:sp>
+      <p:sp>
+        <p:nvSpPr>
+          <p:cNvPr id="3" name="TextBox 2"/>
           <p:cNvSpPr txBox="1"/>
           <p:nvPr/>
         </p:nvSpPr>
         <p:spPr>
           <a:xfrm>
-            <a:off x="731520" y="1371600"/>
-            <a:ext cx="10698480" cy="5029200"/>
+            <a:off x="731520" y="365760"/>
+            <a:ext cx="10728655" cy="1005840"/>
           </a:xfrm>
           <a:prstGeom prst="rect">
             <a:avLst/>
@@ -4734,83 +8427,152 @@
           <a:lstStyle/>
           <a:p>
             <a:pPr>
-              <a:spcBef>
-                <a:spcPts val="1000"/>
-              </a:spcBef>
+              <a:defRPr sz="1100" b="1">
+                <a:solidFill>
+                  <a:srgbClr val="2563EB"/>
+                </a:solidFill>
+              </a:defRPr>
+            </a:pPr>
+            <a:r>
+              <a:t>SYSTEM VERIFICATION &amp; LIVE TELEMETRY • SLIDE 9</a:t>
+            </a:r>
+          </a:p>
+          <a:p>
+            <a:pPr>
+              <a:defRPr sz="2200" b="1">
+                <a:solidFill>
+                  <a:srgbClr val="F8FAFC"/>
+                </a:solidFill>
+              </a:defRPr>
+            </a:pPr>
+            <a:r>
+              <a:t>Live UI: 11 Clinical Parameters Input Form</a:t>
+            </a:r>
+          </a:p>
+        </p:txBody>
+      </p:sp>
+      <p:pic>
+        <p:nvPicPr>
+          <p:cNvPr id="4" name="Picture 3" descr="02_clinical_parameters_input.png"/>
+          <p:cNvPicPr>
+            <a:picLocks noChangeAspect="1"/>
+          </p:cNvPicPr>
+          <p:nvPr/>
+        </p:nvPicPr>
+        <p:blipFill>
+          <a:blip r:embed="rId2"/>
+          <a:stretch>
+            <a:fillRect/>
+          </a:stretch>
+        </p:blipFill>
+        <p:spPr>
+          <a:xfrm>
+            <a:off x="731520" y="1645920"/>
+            <a:ext cx="6949440" cy="4389120"/>
+          </a:xfrm>
+          <a:prstGeom prst="rect">
+            <a:avLst/>
+          </a:prstGeom>
+        </p:spPr>
+      </p:pic>
+      <p:sp>
+        <p:nvSpPr>
+          <p:cNvPr id="5" name="Rounded Rectangle 4"/>
+          <p:cNvSpPr/>
+          <p:nvPr/>
+        </p:nvSpPr>
+        <p:spPr>
+          <a:xfrm>
+            <a:off x="7955279" y="1645920"/>
+            <a:ext cx="3474720" cy="4389120"/>
+          </a:xfrm>
+          <a:prstGeom prst="roundRect">
+            <a:avLst/>
+          </a:prstGeom>
+          <a:solidFill>
+            <a:srgbClr val="1E293B"/>
+          </a:solidFill>
+          <a:ln w="19050">
+            <a:solidFill>
+              <a:srgbClr val="2563EB"/>
+            </a:solidFill>
+          </a:ln>
+        </p:spPr>
+        <p:style>
+          <a:lnRef idx="1">
+            <a:schemeClr val="accent1"/>
+          </a:lnRef>
+          <a:fillRef idx="3">
+            <a:schemeClr val="accent1"/>
+          </a:fillRef>
+          <a:effectRef idx="2">
+            <a:schemeClr val="accent1"/>
+          </a:effectRef>
+          <a:fontRef idx="minor">
+            <a:schemeClr val="lt1"/>
+          </a:fontRef>
+        </p:style>
+        <p:txBody>
+          <a:bodyPr rtlCol="0" anchor="ctr" wrap="square"/>
+          <a:lstStyle/>
+          <a:p>
+            <a:pPr algn="ctr">
               <a:defRPr sz="1500" b="1">
                 <a:solidFill>
-                  <a:srgbClr val="0F172A"/>
-                </a:solidFill>
-              </a:defRPr>
-            </a:pPr>
-            <a:r>
-              <a:t>■ Project Accomplishments</a:t>
-            </a:r>
-          </a:p>
-          <a:p>
-            <a:pPr>
-              <a:defRPr sz="1300">
-                <a:solidFill>
-                  <a:srgbClr val="475569"/>
-                </a:solidFill>
-              </a:defRPr>
-            </a:pPr>
-            <a:r>
-              <a:t>Engineered a robust, end-to-end prototype validating the initial abstract with reproducible experiments.</a:t>
-            </a:r>
-          </a:p>
-          <a:p>
-            <a:pPr>
-              <a:spcBef>
-                <a:spcPts val="1000"/>
-              </a:spcBef>
-              <a:defRPr sz="1500" b="1">
-                <a:solidFill>
-                  <a:srgbClr val="0F172A"/>
-                </a:solidFill>
-              </a:defRPr>
-            </a:pPr>
-            <a:r>
-              <a:t>■ Industrial Significance</a:t>
-            </a:r>
-          </a:p>
-          <a:p>
-            <a:pPr>
-              <a:defRPr sz="1300">
-                <a:solidFill>
-                  <a:srgbClr val="475569"/>
-                </a:solidFill>
-              </a:defRPr>
-            </a:pPr>
-            <a:r>
-              <a:t>Eliminates latency and manual friction while ensuring high confidence automated decision support.</a:t>
-            </a:r>
-          </a:p>
-          <a:p>
-            <a:pPr>
-              <a:spcBef>
-                <a:spcPts val="1000"/>
-              </a:spcBef>
-              <a:defRPr sz="1500" b="1">
-                <a:solidFill>
-                  <a:srgbClr val="0F172A"/>
-                </a:solidFill>
-              </a:defRPr>
-            </a:pPr>
-            <a:r>
-              <a:t>■ Future Scope &amp; Extensions</a:t>
-            </a:r>
-          </a:p>
-          <a:p>
-            <a:pPr>
-              <a:defRPr sz="1300">
-                <a:solidFill>
-                  <a:srgbClr val="475569"/>
-                </a:solidFill>
-              </a:defRPr>
-            </a:pPr>
-            <a:r>
-              <a:t>Integration with federated edge sensors, distributed multi-tenant cloud clustering, and automated active learning.</a:t>
+                  <a:srgbClr val="2563EB"/>
+                </a:solidFill>
+              </a:defRPr>
+            </a:pPr>
+            <a:r>
+              <a:t>Comprehensive Diagnostic Grid</a:t>
+            </a:r>
+          </a:p>
+          <a:p>
+            <a:pPr>
+              <a:defRPr sz="1100">
+                <a:solidFill>
+                  <a:srgbClr val="94A3B8"/>
+                </a:solidFill>
+              </a:defRPr>
+            </a:pPr>
+            <a:r>
+              <a:t>• Responsive multi-column form organizing demographic, hemodynamic, and ECG markers.</a:t>
+            </a:r>
+          </a:p>
+          <a:p>
+            <a:pPr>
+              <a:defRPr sz="1100">
+                <a:solidFill>
+                  <a:srgbClr val="94A3B8"/>
+                </a:solidFill>
+              </a:defRPr>
+            </a:pPr>
+            <a:r>
+              <a:t>• Tooltip info icons guiding clinicians on exact medical parameters and measurement units.</a:t>
+            </a:r>
+          </a:p>
+          <a:p>
+            <a:pPr>
+              <a:defRPr sz="1100">
+                <a:solidFill>
+                  <a:srgbClr val="94A3B8"/>
+                </a:solidFill>
+              </a:defRPr>
+            </a:pPr>
+            <a:r>
+              <a:t>• Bounded numeric inputs and validated select dropdowns preventing data entry corruption.</a:t>
+            </a:r>
+          </a:p>
+          <a:p>
+            <a:pPr>
+              <a:defRPr sz="1100">
+                <a:solidFill>
+                  <a:srgbClr val="94A3B8"/>
+                </a:solidFill>
+              </a:defRPr>
+            </a:pPr>
+            <a:r>
+              <a:t>• Instant client-side validation ensuring schema integrity prior to API dispatch.</a:t>
             </a:r>
           </a:p>
         </p:txBody>
